--- a/budget-transfer/kickoff/IT予算移管の要点_予算ガイドライン追補_2026-11.pptx
+++ b/budget-transfer/kickoff/IT予算移管の要点_予算ガイドライン追補_2026-11.pptx
@@ -15,6 +15,7 @@
     <p:sldId id="259" r:id="rId9"/>
     <p:sldId id="261" r:id="rId11"/>
     <p:sldId id="267" r:id="rId102"/>
+    <p:sldId id="284" r:id="rId15"/>
   </p:sldIdLst>
   <p:sldSz cy="6858000" cx="12192000"/>
   <p:notesSz cx="6858000" cy="12192000"/>
@@ -271,6 +272,7 @@
         <p14:section name="IT資産管理" id="{7F319247-5CD6-4AF9-B288-B32F66FBC758}">
           <p14:sldIdLst>
             <p14:sldId id="267"/>
+            <p14:sldId id="284"/>
           </p14:sldIdLst>
         </p14:section>
       </p14:sectionLst>
@@ -2114,6 +2116,76 @@
             <a:endParaRPr/>
           </a:p>
         </p:txBody>
+      </p:sp>
+    </p:spTree>
+  </p:cSld>
+  <p:clrMapOvr>
+    <a:masterClrMapping/>
+  </p:clrMapOvr>
+</p:notes>
+</file>
+
+<file path=ppt/notesSlides/notesSlide8.xml><?xml version="1.0" encoding="utf-8"?>
+<p:notes xmlns:a="http://schemas.openxmlformats.org/drawingml/2006/main" xmlns:p="http://schemas.openxmlformats.org/presentationml/2006/main" xmlns:r="http://schemas.openxmlformats.org/officeDocument/2006/relationships">
+  <p:cSld>
+    <p:spTree>
+      <p:nvGrpSpPr>
+        <p:cNvPr id="1" name=""/>
+        <p:cNvGrpSpPr/>
+        <p:nvPr/>
+      </p:nvGrpSpPr>
+      <p:grpSpPr>
+        <a:xfrm>
+          <a:off x="0" y="0"/>
+          <a:ext cx="0" cy="0"/>
+          <a:chOff x="0" y="0"/>
+          <a:chExt cx="0" cy="0"/>
+        </a:xfrm>
+      </p:grpSpPr>
+      <p:sp>
+        <p:nvSpPr>
+          <p:cNvPr id="2" name="Slide Image Placeholder 1"/>
+          <p:cNvSpPr>
+            <a:spLocks noGrp="1"/>
+          </p:cNvSpPr>
+          <p:nvPr>
+            <p:ph type="sldImg" idx="3"/>
+          </p:nvPr>
+        </p:nvSpPr>
+        <p:spPr/>
+      </p:sp>
+      <p:sp>
+        <p:nvSpPr>
+          <p:cNvPr id="3" name="Notes Placeholder 2"/>
+          <p:cNvSpPr>
+            <a:spLocks noGrp="1"/>
+          </p:cNvSpPr>
+          <p:nvPr>
+            <p:ph type="body" idx="1"/>
+          </p:nvPr>
+        </p:nvSpPr>
+        <p:spPr/>
+        <p:txBody>
+          <a:bodyPr/>
+          <a:lstStyle/>
+          <a:p>
+            <a:r>
+              <a:t>キックオフの後、まず始めてほしいことは3つです。ヒアリングシートを基に移管元との合意を始めること、進捗管理表の自分の行を記入して移管ステータスを更新できるようにすること、そして今年度から続く IT投資案件を洗い出して財務経理との確認の場を設けることです。最終期限は12月31日、移管の稟議の承認です。</a:t>
+            </a:r>
+          </a:p>
+        </p:txBody>
+      </p:sp>
+      <p:sp>
+        <p:nvSpPr>
+          <p:cNvPr id="4" name="Slide Number Placeholder 3"/>
+          <p:cNvSpPr>
+            <a:spLocks noGrp="1"/>
+          </p:cNvSpPr>
+          <p:nvPr>
+            <p:ph type="sldNum" idx="12"/>
+          </p:nvPr>
+        </p:nvSpPr>
+        <p:spPr/>
       </p:sp>
     </p:spTree>
   </p:cSld>
@@ -4510,6 +4582,724 @@
 </p:sld>
 </file>
 
+<file path=ppt/slides/slide10.xml><?xml version="1.0" encoding="utf-8"?>
+<p:sld xmlns:a="http://schemas.openxmlformats.org/drawingml/2006/main" xmlns:p="http://schemas.openxmlformats.org/presentationml/2006/main" xmlns:r="http://schemas.openxmlformats.org/officeDocument/2006/relationships">
+  <p:cSld>
+    <p:spTree>
+      <p:nvGrpSpPr>
+        <p:cNvPr id="1" name=""/>
+        <p:cNvGrpSpPr/>
+        <p:nvPr/>
+      </p:nvGrpSpPr>
+      <p:grpSpPr/>
+      <p:sp>
+        <p:nvSpPr>
+          <p:cNvPr id="2" name="Text 0"/>
+          <p:cNvSpPr/>
+          <p:nvPr>
+            <p:ph idx="100" type="title" hasCustomPrompt="1"/>
+          </p:nvPr>
+        </p:nvSpPr>
+        <p:spPr>
+          <a:xfrm>
+            <a:off x="635000" y="406400"/>
+            <a:ext cx="10922000" cy="431800"/>
+          </a:xfrm>
+          <a:prstGeom prst="rect">
+            <a:avLst/>
+          </a:prstGeom>
+          <a:noFill/>
+          <a:ln/>
+        </p:spPr>
+        <p:txBody>
+          <a:bodyPr wrap="square" lIns="0" tIns="0" rIns="0" bIns="0" rtlCol="0" anchor="t"/>
+          <a:lstStyle/>
+          <a:p>
+            <a:pPr algn="l" indent="0" marL="0">
+              <a:buNone/>
+            </a:pPr>
+            <a:r>
+              <a:rPr lang="en-US" sz="2400" b="1" dirty="0">
+                <a:solidFill>
+                  <a:srgbClr val="23323B"/>
+                </a:solidFill>
+                <a:latin typeface="Arial" pitchFamily="34" charset="0"/>
+                <a:ea typeface="Arial" pitchFamily="34" charset="-122"/>
+                <a:cs typeface="Arial" pitchFamily="34" charset="-120"/>
+              </a:rPr>
+              <a:t>次のアクション（11月）</a:t>
+            </a:r>
+            <a:endParaRPr lang="en-US" sz="2400" dirty="0" b="1">
+              <a:solidFill>
+                <a:srgbClr val="23323B"/>
+              </a:solidFill>
+            </a:endParaRPr>
+          </a:p>
+        </p:txBody>
+      </p:sp>
+      <p:sp>
+        <p:nvSpPr>
+          <p:cNvPr id="25" name="Slide Number Placeholder 0"/>
+          <p:cNvSpPr>
+            <a:spLocks noGrp="1"/>
+          </p:cNvSpPr>
+          <p:nvPr>
+            <p:ph type="sldNum" sz="quarter" idx="4294967295"/>
+          </p:nvPr>
+        </p:nvSpPr>
+        <p:spPr>
+          <a:xfrm>
+            <a:off x="10795000" y="6527800"/>
+            <a:ext cx="762000" cy="152400"/>
+          </a:xfrm>
+          <a:prstGeom prst="rect">
+            <a:avLst/>
+          </a:prstGeom>
+          <a:extLst>
+            <a:ext uri="{C572A759-6A51-4108-AA02-DFA0A04FC94B}">
+              <ma14:wrappingTextBoxFlag xmlns:ma14="http://schemas.microsoft.com/office/mac/drawingml/2011/main" val="0"/>
+            </a:ext>
+          </a:extLst>
+        </p:spPr>
+        <p:txBody>
+          <a:bodyPr anchor="b" lIns="0" tIns="0" rIns="0" bIns="0"/>
+          <a:lstStyle>
+            <a:lvl1pPr>
+              <a:defRPr sz="900">
+                <a:solidFill>
+                  <a:srgbClr val="7F7F7F"/>
+                </a:solidFill>
+              </a:defRPr>
+            </a:lvl1pPr>
+          </a:lstStyle>
+          <a:p>
+            <a:pPr algn="r"/>
+            <a:fld id="{F7021451-1387-4CA6-816F-3879F97B5CBC}" type="slidenum">
+              <a:rPr b="0" lang="en-US" sz="1000">
+                <a:solidFill>
+                  <a:srgbClr val="7F7F7F"/>
+                </a:solidFill>
+              </a:rPr>
+              <a:t>2</a:t>
+            </a:fld>
+            <a:endParaRPr lang="en-US" sz="1000" b="0">
+              <a:solidFill>
+                <a:srgbClr val="7F7F7F"/>
+              </a:solidFill>
+            </a:endParaRPr>
+          </a:p>
+        </p:txBody>
+      </p:sp>
+      <p:sp>
+        <p:nvSpPr>
+          <p:cNvPr id="26" name="TextBox 25"/>
+          <p:cNvSpPr txBox="1"/>
+          <p:nvPr/>
+        </p:nvSpPr>
+        <p:spPr>
+          <a:xfrm>
+            <a:off x="630936" y="886968"/>
+            <a:ext cx="10917936" cy="283464"/>
+          </a:xfrm>
+          <a:prstGeom prst="rect">
+            <a:avLst/>
+          </a:prstGeom>
+          <a:noFill/>
+        </p:spPr>
+        <p:txBody>
+          <a:bodyPr wrap="square" lIns="0" rIns="0" tIns="0" bIns="0" anchor="t">
+            <a:spAutoFit/>
+          </a:bodyPr>
+          <a:lstStyle/>
+          <a:p>
+            <a:pPr algn="l"/>
+            <a:r>
+              <a:rPr sz="1400" b="1">
+                <a:solidFill>
+                  <a:srgbClr val="404040"/>
+                </a:solidFill>
+                <a:latin typeface="Arial"/>
+                <a:ea typeface="Arial"/>
+              </a:rPr>
+              <a:t>キックオフの後、まず次の3つから始める</a:t>
+            </a:r>
+          </a:p>
+        </p:txBody>
+      </p:sp>
+      <p:sp>
+        <p:nvSpPr>
+          <p:cNvPr id="27" name="action-1"/>
+          <p:cNvSpPr/>
+          <p:nvPr/>
+        </p:nvSpPr>
+        <p:spPr>
+          <a:xfrm>
+            <a:off x="630936" y="1554480"/>
+            <a:ext cx="10917936" cy="896112"/>
+          </a:xfrm>
+          <a:prstGeom prst="rect">
+            <a:avLst/>
+          </a:prstGeom>
+          <a:solidFill>
+            <a:srgbClr val="F2F2F2"/>
+          </a:solidFill>
+          <a:ln>
+            <a:noFill/>
+          </a:ln>
+          <a:effectLst/>
+        </p:spPr>
+        <p:style>
+          <a:lnRef idx="1">
+            <a:schemeClr val="accent1"/>
+          </a:lnRef>
+          <a:fillRef idx="3">
+            <a:schemeClr val="accent1"/>
+          </a:fillRef>
+          <a:effectRef idx="2">
+            <a:schemeClr val="accent1"/>
+          </a:effectRef>
+          <a:fontRef idx="minor">
+            <a:schemeClr val="lt1"/>
+          </a:fontRef>
+        </p:style>
+        <p:txBody>
+          <a:bodyPr rtlCol="0" anchor="ctr"/>
+          <a:lstStyle/>
+          <a:p>
+            <a:pPr algn="ctr"/>
+          </a:p>
+        </p:txBody>
+      </p:sp>
+      <p:sp>
+        <p:nvSpPr>
+          <p:cNvPr id="28" name="check-1"/>
+          <p:cNvSpPr/>
+          <p:nvPr/>
+        </p:nvSpPr>
+        <p:spPr>
+          <a:xfrm>
+            <a:off x="914400" y="1792224"/>
+            <a:ext cx="420624" cy="420624"/>
+          </a:xfrm>
+          <a:prstGeom prst="rect">
+            <a:avLst/>
+          </a:prstGeom>
+          <a:solidFill>
+            <a:srgbClr val="FFFFFF"/>
+          </a:solidFill>
+          <a:ln w="19050">
+            <a:solidFill>
+              <a:srgbClr val="23323B"/>
+            </a:solidFill>
+          </a:ln>
+          <a:effectLst/>
+        </p:spPr>
+        <p:style>
+          <a:lnRef idx="1">
+            <a:schemeClr val="accent1"/>
+          </a:lnRef>
+          <a:fillRef idx="3">
+            <a:schemeClr val="accent1"/>
+          </a:fillRef>
+          <a:effectRef idx="2">
+            <a:schemeClr val="accent1"/>
+          </a:effectRef>
+          <a:fontRef idx="minor">
+            <a:schemeClr val="lt1"/>
+          </a:fontRef>
+        </p:style>
+        <p:txBody>
+          <a:bodyPr rtlCol="0" anchor="ctr"/>
+          <a:lstStyle/>
+          <a:p>
+            <a:pPr algn="ctr"/>
+          </a:p>
+        </p:txBody>
+      </p:sp>
+      <p:sp>
+        <p:nvSpPr>
+          <p:cNvPr id="29" name="TextBox 28"/>
+          <p:cNvSpPr txBox="1"/>
+          <p:nvPr/>
+        </p:nvSpPr>
+        <p:spPr>
+          <a:xfrm>
+            <a:off x="1645920" y="1554480"/>
+            <a:ext cx="1463040" cy="896112"/>
+          </a:xfrm>
+          <a:prstGeom prst="rect">
+            <a:avLst/>
+          </a:prstGeom>
+          <a:noFill/>
+        </p:spPr>
+        <p:txBody>
+          <a:bodyPr wrap="square" lIns="0" rIns="0" tIns="0" bIns="0" anchor="ctr">
+            <a:spAutoFit/>
+          </a:bodyPr>
+          <a:lstStyle/>
+          <a:p>
+            <a:pPr algn="l"/>
+            <a:r>
+              <a:rPr sz="1100" b="1">
+                <a:solidFill>
+                  <a:srgbClr val="7F7F7F"/>
+                </a:solidFill>
+                <a:latin typeface="Arial"/>
+                <a:ea typeface="Arial"/>
+              </a:rPr>
+              <a:t>担当BP</a:t>
+            </a:r>
+          </a:p>
+        </p:txBody>
+      </p:sp>
+      <p:sp>
+        <p:nvSpPr>
+          <p:cNvPr id="30" name="TextBox 29"/>
+          <p:cNvSpPr txBox="1"/>
+          <p:nvPr/>
+        </p:nvSpPr>
+        <p:spPr>
+          <a:xfrm>
+            <a:off x="3017520" y="1554480"/>
+            <a:ext cx="8321040" cy="896112"/>
+          </a:xfrm>
+          <a:prstGeom prst="rect">
+            <a:avLst/>
+          </a:prstGeom>
+          <a:noFill/>
+        </p:spPr>
+        <p:txBody>
+          <a:bodyPr wrap="square" lIns="0" rIns="0" tIns="0" bIns="0" anchor="ctr">
+            <a:spAutoFit/>
+          </a:bodyPr>
+          <a:lstStyle/>
+          <a:p>
+            <a:pPr algn="l"/>
+            <a:r>
+              <a:rPr sz="1600" b="1">
+                <a:solidFill>
+                  <a:srgbClr val="23323B"/>
+                </a:solidFill>
+                <a:latin typeface="Arial"/>
+                <a:ea typeface="Arial"/>
+              </a:rPr>
+              <a:t>ヒアリングシートを基に、移管元との合意を始める</a:t>
+            </a:r>
+          </a:p>
+        </p:txBody>
+      </p:sp>
+      <p:sp>
+        <p:nvSpPr>
+          <p:cNvPr id="31" name="action-2"/>
+          <p:cNvSpPr/>
+          <p:nvPr/>
+        </p:nvSpPr>
+        <p:spPr>
+          <a:xfrm>
+            <a:off x="630936" y="2651760"/>
+            <a:ext cx="10917936" cy="896112"/>
+          </a:xfrm>
+          <a:prstGeom prst="rect">
+            <a:avLst/>
+          </a:prstGeom>
+          <a:solidFill>
+            <a:srgbClr val="F2F2F2"/>
+          </a:solidFill>
+          <a:ln>
+            <a:noFill/>
+          </a:ln>
+          <a:effectLst/>
+        </p:spPr>
+        <p:style>
+          <a:lnRef idx="1">
+            <a:schemeClr val="accent1"/>
+          </a:lnRef>
+          <a:fillRef idx="3">
+            <a:schemeClr val="accent1"/>
+          </a:fillRef>
+          <a:effectRef idx="2">
+            <a:schemeClr val="accent1"/>
+          </a:effectRef>
+          <a:fontRef idx="minor">
+            <a:schemeClr val="lt1"/>
+          </a:fontRef>
+        </p:style>
+        <p:txBody>
+          <a:bodyPr rtlCol="0" anchor="ctr"/>
+          <a:lstStyle/>
+          <a:p>
+            <a:pPr algn="ctr"/>
+          </a:p>
+        </p:txBody>
+      </p:sp>
+      <p:sp>
+        <p:nvSpPr>
+          <p:cNvPr id="32" name="check-2"/>
+          <p:cNvSpPr/>
+          <p:nvPr/>
+        </p:nvSpPr>
+        <p:spPr>
+          <a:xfrm>
+            <a:off x="914400" y="2889504"/>
+            <a:ext cx="420624" cy="420624"/>
+          </a:xfrm>
+          <a:prstGeom prst="rect">
+            <a:avLst/>
+          </a:prstGeom>
+          <a:solidFill>
+            <a:srgbClr val="FFFFFF"/>
+          </a:solidFill>
+          <a:ln w="19050">
+            <a:solidFill>
+              <a:srgbClr val="23323B"/>
+            </a:solidFill>
+          </a:ln>
+          <a:effectLst/>
+        </p:spPr>
+        <p:style>
+          <a:lnRef idx="1">
+            <a:schemeClr val="accent1"/>
+          </a:lnRef>
+          <a:fillRef idx="3">
+            <a:schemeClr val="accent1"/>
+          </a:fillRef>
+          <a:effectRef idx="2">
+            <a:schemeClr val="accent1"/>
+          </a:effectRef>
+          <a:fontRef idx="minor">
+            <a:schemeClr val="lt1"/>
+          </a:fontRef>
+        </p:style>
+        <p:txBody>
+          <a:bodyPr rtlCol="0" anchor="ctr"/>
+          <a:lstStyle/>
+          <a:p>
+            <a:pPr algn="ctr"/>
+          </a:p>
+        </p:txBody>
+      </p:sp>
+      <p:sp>
+        <p:nvSpPr>
+          <p:cNvPr id="33" name="TextBox 32"/>
+          <p:cNvSpPr txBox="1"/>
+          <p:nvPr/>
+        </p:nvSpPr>
+        <p:spPr>
+          <a:xfrm>
+            <a:off x="1645920" y="2651760"/>
+            <a:ext cx="1463040" cy="896112"/>
+          </a:xfrm>
+          <a:prstGeom prst="rect">
+            <a:avLst/>
+          </a:prstGeom>
+          <a:noFill/>
+        </p:spPr>
+        <p:txBody>
+          <a:bodyPr wrap="square" lIns="0" rIns="0" tIns="0" bIns="0" anchor="ctr">
+            <a:spAutoFit/>
+          </a:bodyPr>
+          <a:lstStyle/>
+          <a:p>
+            <a:pPr algn="l"/>
+            <a:r>
+              <a:rPr sz="1100" b="1">
+                <a:solidFill>
+                  <a:srgbClr val="7F7F7F"/>
+                </a:solidFill>
+                <a:latin typeface="Arial"/>
+                <a:ea typeface="Arial"/>
+              </a:rPr>
+              <a:t>担当BP</a:t>
+            </a:r>
+          </a:p>
+        </p:txBody>
+      </p:sp>
+      <p:sp>
+        <p:nvSpPr>
+          <p:cNvPr id="34" name="TextBox 33"/>
+          <p:cNvSpPr txBox="1"/>
+          <p:nvPr/>
+        </p:nvSpPr>
+        <p:spPr>
+          <a:xfrm>
+            <a:off x="3017520" y="2651760"/>
+            <a:ext cx="8321040" cy="896112"/>
+          </a:xfrm>
+          <a:prstGeom prst="rect">
+            <a:avLst/>
+          </a:prstGeom>
+          <a:noFill/>
+        </p:spPr>
+        <p:txBody>
+          <a:bodyPr wrap="square" lIns="0" rIns="0" tIns="0" bIns="0" anchor="ctr">
+            <a:spAutoFit/>
+          </a:bodyPr>
+          <a:lstStyle/>
+          <a:p>
+            <a:pPr algn="l"/>
+            <a:r>
+              <a:rPr sz="1600" b="1">
+                <a:solidFill>
+                  <a:srgbClr val="23323B"/>
+                </a:solidFill>
+                <a:latin typeface="Arial"/>
+                <a:ea typeface="Arial"/>
+              </a:rPr>
+              <a:t>進捗管理表の自分の行を記入し、移管ステータスを更新できるようにする</a:t>
+            </a:r>
+          </a:p>
+        </p:txBody>
+      </p:sp>
+      <p:sp>
+        <p:nvSpPr>
+          <p:cNvPr id="35" name="action-3"/>
+          <p:cNvSpPr/>
+          <p:nvPr/>
+        </p:nvSpPr>
+        <p:spPr>
+          <a:xfrm>
+            <a:off x="630936" y="3749039"/>
+            <a:ext cx="10917936" cy="896112"/>
+          </a:xfrm>
+          <a:prstGeom prst="rect">
+            <a:avLst/>
+          </a:prstGeom>
+          <a:solidFill>
+            <a:srgbClr val="F2F2F2"/>
+          </a:solidFill>
+          <a:ln>
+            <a:noFill/>
+          </a:ln>
+          <a:effectLst/>
+        </p:spPr>
+        <p:style>
+          <a:lnRef idx="1">
+            <a:schemeClr val="accent1"/>
+          </a:lnRef>
+          <a:fillRef idx="3">
+            <a:schemeClr val="accent1"/>
+          </a:fillRef>
+          <a:effectRef idx="2">
+            <a:schemeClr val="accent1"/>
+          </a:effectRef>
+          <a:fontRef idx="minor">
+            <a:schemeClr val="lt1"/>
+          </a:fontRef>
+        </p:style>
+        <p:txBody>
+          <a:bodyPr rtlCol="0" anchor="ctr"/>
+          <a:lstStyle/>
+          <a:p>
+            <a:pPr algn="ctr"/>
+          </a:p>
+        </p:txBody>
+      </p:sp>
+      <p:sp>
+        <p:nvSpPr>
+          <p:cNvPr id="36" name="check-3"/>
+          <p:cNvSpPr/>
+          <p:nvPr/>
+        </p:nvSpPr>
+        <p:spPr>
+          <a:xfrm>
+            <a:off x="914400" y="3986783"/>
+            <a:ext cx="420624" cy="420624"/>
+          </a:xfrm>
+          <a:prstGeom prst="rect">
+            <a:avLst/>
+          </a:prstGeom>
+          <a:solidFill>
+            <a:srgbClr val="FFFFFF"/>
+          </a:solidFill>
+          <a:ln w="19050">
+            <a:solidFill>
+              <a:srgbClr val="23323B"/>
+            </a:solidFill>
+          </a:ln>
+          <a:effectLst/>
+        </p:spPr>
+        <p:style>
+          <a:lnRef idx="1">
+            <a:schemeClr val="accent1"/>
+          </a:lnRef>
+          <a:fillRef idx="3">
+            <a:schemeClr val="accent1"/>
+          </a:fillRef>
+          <a:effectRef idx="2">
+            <a:schemeClr val="accent1"/>
+          </a:effectRef>
+          <a:fontRef idx="minor">
+            <a:schemeClr val="lt1"/>
+          </a:fontRef>
+        </p:style>
+        <p:txBody>
+          <a:bodyPr rtlCol="0" anchor="ctr"/>
+          <a:lstStyle/>
+          <a:p>
+            <a:pPr algn="ctr"/>
+          </a:p>
+        </p:txBody>
+      </p:sp>
+      <p:sp>
+        <p:nvSpPr>
+          <p:cNvPr id="37" name="TextBox 36"/>
+          <p:cNvSpPr txBox="1"/>
+          <p:nvPr/>
+        </p:nvSpPr>
+        <p:spPr>
+          <a:xfrm>
+            <a:off x="1645920" y="3749039"/>
+            <a:ext cx="1463040" cy="896112"/>
+          </a:xfrm>
+          <a:prstGeom prst="rect">
+            <a:avLst/>
+          </a:prstGeom>
+          <a:noFill/>
+        </p:spPr>
+        <p:txBody>
+          <a:bodyPr wrap="square" lIns="0" rIns="0" tIns="0" bIns="0" anchor="ctr">
+            <a:spAutoFit/>
+          </a:bodyPr>
+          <a:lstStyle/>
+          <a:p>
+            <a:pPr algn="l"/>
+            <a:r>
+              <a:rPr sz="1100" b="1">
+                <a:solidFill>
+                  <a:srgbClr val="7F7F7F"/>
+                </a:solidFill>
+                <a:latin typeface="Arial"/>
+                <a:ea typeface="Arial"/>
+              </a:rPr>
+              <a:t>担当BP</a:t>
+            </a:r>
+          </a:p>
+        </p:txBody>
+      </p:sp>
+      <p:sp>
+        <p:nvSpPr>
+          <p:cNvPr id="38" name="TextBox 37"/>
+          <p:cNvSpPr txBox="1"/>
+          <p:nvPr/>
+        </p:nvSpPr>
+        <p:spPr>
+          <a:xfrm>
+            <a:off x="3017520" y="3749039"/>
+            <a:ext cx="8321040" cy="896112"/>
+          </a:xfrm>
+          <a:prstGeom prst="rect">
+            <a:avLst/>
+          </a:prstGeom>
+          <a:noFill/>
+        </p:spPr>
+        <p:txBody>
+          <a:bodyPr wrap="square" lIns="0" rIns="0" tIns="0" bIns="0" anchor="ctr">
+            <a:spAutoFit/>
+          </a:bodyPr>
+          <a:lstStyle/>
+          <a:p>
+            <a:pPr algn="l"/>
+            <a:r>
+              <a:rPr sz="1600" b="1">
+                <a:solidFill>
+                  <a:srgbClr val="23323B"/>
+                </a:solidFill>
+                <a:latin typeface="Arial"/>
+                <a:ea typeface="Arial"/>
+              </a:rPr>
+              <a:t>今年度から続く IT投資案件（取得済みの資産、建設仮勘定、着手済み）を洗い出し、財務経理との確認の場を設ける</a:t>
+            </a:r>
+          </a:p>
+        </p:txBody>
+      </p:sp>
+      <p:sp>
+        <p:nvSpPr>
+          <p:cNvPr id="39" name="deadline-band"/>
+          <p:cNvSpPr/>
+          <p:nvPr/>
+        </p:nvSpPr>
+        <p:spPr>
+          <a:xfrm>
+            <a:off x="630936" y="5029200"/>
+            <a:ext cx="10917936" cy="566928"/>
+          </a:xfrm>
+          <a:prstGeom prst="rect">
+            <a:avLst/>
+          </a:prstGeom>
+          <a:solidFill>
+            <a:srgbClr val="23323B"/>
+          </a:solidFill>
+          <a:ln>
+            <a:noFill/>
+          </a:ln>
+          <a:effectLst/>
+        </p:spPr>
+        <p:style>
+          <a:lnRef idx="1">
+            <a:schemeClr val="accent1"/>
+          </a:lnRef>
+          <a:fillRef idx="3">
+            <a:schemeClr val="accent1"/>
+          </a:fillRef>
+          <a:effectRef idx="2">
+            <a:schemeClr val="accent1"/>
+          </a:effectRef>
+          <a:fontRef idx="minor">
+            <a:schemeClr val="lt1"/>
+          </a:fontRef>
+        </p:style>
+        <p:txBody>
+          <a:bodyPr rtlCol="0" anchor="ctr"/>
+          <a:lstStyle/>
+          <a:p>
+            <a:pPr algn="ctr"/>
+          </a:p>
+        </p:txBody>
+      </p:sp>
+      <p:sp>
+        <p:nvSpPr>
+          <p:cNvPr id="40" name="TextBox 39"/>
+          <p:cNvSpPr txBox="1"/>
+          <p:nvPr/>
+        </p:nvSpPr>
+        <p:spPr>
+          <a:xfrm>
+            <a:off x="868680" y="5029200"/>
+            <a:ext cx="10515600" cy="566928"/>
+          </a:xfrm>
+          <a:prstGeom prst="rect">
+            <a:avLst/>
+          </a:prstGeom>
+          <a:noFill/>
+        </p:spPr>
+        <p:txBody>
+          <a:bodyPr wrap="square" lIns="0" rIns="0" tIns="0" bIns="0" anchor="ctr">
+            <a:spAutoFit/>
+          </a:bodyPr>
+          <a:lstStyle/>
+          <a:p>
+            <a:pPr algn="l"/>
+            <a:r>
+              <a:rPr sz="1800" b="1">
+                <a:solidFill>
+                  <a:srgbClr val="FFFFFF"/>
+                </a:solidFill>
+                <a:latin typeface="Arial"/>
+                <a:ea typeface="Arial"/>
+              </a:rPr>
+              <a:t>最終期限：12月31日　移管の稟議の承認</a:t>
+            </a:r>
+          </a:p>
+        </p:txBody>
+      </p:sp>
+    </p:spTree>
+  </p:cSld>
+  <p:clrMapOvr>
+    <a:masterClrMapping/>
+  </p:clrMapOvr>
+</p:sld>
+</file>
+
 <file path=ppt/slides/slide2.xml><?xml version="1.0" encoding="utf-8"?>
 <p:sld xmlns:a="http://schemas.openxmlformats.org/drawingml/2006/main" xmlns:r="http://schemas.openxmlformats.org/officeDocument/2006/relationships" xmlns:p="http://schemas.openxmlformats.org/presentationml/2006/main">
   <p:cSld>
@@ -5937,1315 +6727,6 @@
       </p:sp>
       <p:sp>
         <p:nvSpPr>
-          <p:cNvPr id="52" name="Google Shape;52;p7"/>
-          <p:cNvSpPr/>
-          <p:nvPr/>
-        </p:nvSpPr>
-        <p:spPr>
-          <a:xfrm>
-            <a:off x="635000" y="1143000"/>
-            <a:ext cx="10919048" cy="1131956"/>
-          </a:xfrm>
-          <a:prstGeom prst="rect">
-            <a:avLst/>
-          </a:prstGeom>
-          <a:solidFill>
-            <a:srgbClr val="FEDCCA"/>
-          </a:solidFill>
-          <a:ln>
-            <a:noFill/>
-          </a:ln>
-        </p:spPr>
-        <p:txBody>
-          <a:bodyPr anchorCtr="0" anchor="ctr" bIns="91425" lIns="91425" spcFirstLastPara="1" rIns="91425" wrap="square" tIns="91425">
-            <a:noAutofit/>
-          </a:bodyPr>
-          <a:lstStyle/>
-          <a:p>
-            <a:pPr indent="0" lvl="0" marL="0" rtl="0" algn="l">
-              <a:spcBef>
-                <a:spcPts val="0"/>
-              </a:spcBef>
-              <a:spcAft>
-                <a:spcPts val="0"/>
-              </a:spcAft>
-              <a:buNone/>
-            </a:pPr>
-            <a:r>
-              <a:t/>
-            </a:r>
-            <a:endParaRPr/>
-          </a:p>
-        </p:txBody>
-      </p:sp>
-      <p:sp>
-        <p:nvSpPr>
-          <p:cNvPr id="53" name="Google Shape;53;p7"/>
-          <p:cNvSpPr txBox="1"/>
-          <p:nvPr/>
-        </p:nvSpPr>
-        <p:spPr>
-          <a:xfrm>
-            <a:off x="989227" y="1251667"/>
-            <a:ext cx="10184027" cy="561450"/>
-          </a:xfrm>
-          <a:prstGeom prst="rect">
-            <a:avLst/>
-          </a:prstGeom>
-          <a:noFill/>
-          <a:ln>
-            <a:noFill/>
-          </a:ln>
-        </p:spPr>
-        <p:txBody>
-          <a:bodyPr anchorCtr="0" anchor="ctr" bIns="0" lIns="0" spcFirstLastPara="1" rIns="0" wrap="square" tIns="0">
-            <a:noAutofit/>
-          </a:bodyPr>
-          <a:lstStyle/>
-          <a:p>
-            <a:pPr indent="0" lvl="0" marL="0" marR="0" rtl="0" algn="l">
-              <a:spcBef>
-                <a:spcPts val="0"/>
-              </a:spcBef>
-              <a:spcAft>
-                <a:spcPts val="0"/>
-              </a:spcAft>
-              <a:buClr>
-                <a:srgbClr val="23323B"/>
-              </a:buClr>
-              <a:buSzPts val="2800"/>
-              <a:buFont typeface="Arial"/>
-              <a:buNone/>
-            </a:pPr>
-            <a:r>
-              <a:rPr b="1" i="0" lang="en-US" sz="2800" u="none" cap="none" strike="noStrike">
-                <a:solidFill>
-                  <a:srgbClr val="23323B"/>
-                </a:solidFill>
-                <a:latin typeface="Arial"/>
-                <a:ea typeface="Arial"/>
-                <a:cs typeface="Arial"/>
-                <a:sym typeface="Arial"/>
-              </a:rPr>
-              <a:t>移管の稟議が、12月末までに承認されること</a:t>
-            </a:r>
-            <a:endParaRPr b="0" i="0" sz="2800" u="none" cap="none" strike="noStrike">
-              <a:solidFill>
-                <a:srgbClr val="000000"/>
-              </a:solidFill>
-              <a:latin typeface="Arial"/>
-              <a:ea typeface="Arial"/>
-              <a:cs typeface="Arial"/>
-              <a:sym typeface="Arial"/>
-            </a:endParaRPr>
-          </a:p>
-        </p:txBody>
-      </p:sp>
-      <p:sp>
-        <p:nvSpPr>
-          <p:cNvPr id="54" name="Google Shape;54;p7"/>
-          <p:cNvSpPr txBox="1"/>
-          <p:nvPr/>
-        </p:nvSpPr>
-        <p:spPr>
-          <a:xfrm>
-            <a:off x="989227" y="1840285"/>
-            <a:ext cx="10184027" cy="307892"/>
-          </a:xfrm>
-          <a:prstGeom prst="rect">
-            <a:avLst/>
-          </a:prstGeom>
-          <a:noFill/>
-          <a:ln>
-            <a:noFill/>
-          </a:ln>
-        </p:spPr>
-        <p:txBody>
-          <a:bodyPr anchorCtr="0" anchor="ctr" bIns="0" lIns="0" spcFirstLastPara="1" rIns="0" wrap="square" tIns="0">
-            <a:noAutofit/>
-          </a:bodyPr>
-          <a:lstStyle/>
-          <a:p>
-            <a:pPr indent="0" lvl="0" marL="0" marR="0" rtl="0" algn="l">
-              <a:spcBef>
-                <a:spcPts val="0"/>
-              </a:spcBef>
-              <a:spcAft>
-                <a:spcPts val="0"/>
-              </a:spcAft>
-              <a:buClr>
-                <a:srgbClr val="404040"/>
-              </a:buClr>
-              <a:buSzPts val="1400"/>
-              <a:buFont typeface="Arial"/>
-              <a:buNone/>
-            </a:pPr>
-            <a:r>
-              <a:rPr b="0" i="0" lang="en-US" sz="1400" u="none" cap="none" strike="noStrike">
-                <a:solidFill>
-                  <a:srgbClr val="404040"/>
-                </a:solidFill>
-                <a:latin typeface="Arial"/>
-                <a:ea typeface="Arial"/>
-                <a:cs typeface="Arial"/>
-                <a:sym typeface="Arial"/>
-              </a:rPr>
-              <a:t>今期は12月末の移管の承認を目指す。移管による効果の創出は、来期に改めて検討する</a:t>
-            </a:r>
-            <a:endParaRPr b="0" i="0" sz="1400" u="none" cap="none" strike="noStrike">
-              <a:solidFill>
-                <a:srgbClr val="000000"/>
-              </a:solidFill>
-              <a:latin typeface="Arial"/>
-              <a:ea typeface="Arial"/>
-              <a:cs typeface="Arial"/>
-              <a:sym typeface="Arial"/>
-            </a:endParaRPr>
-          </a:p>
-        </p:txBody>
-      </p:sp>
-      <p:sp>
-        <p:nvSpPr>
-          <p:cNvPr id="55" name="Google Shape;55;p7"/>
-          <p:cNvSpPr/>
-          <p:nvPr/>
-        </p:nvSpPr>
-        <p:spPr>
-          <a:xfrm>
-            <a:off x="635000" y="2456069"/>
-            <a:ext cx="3533414" cy="3893930"/>
-          </a:xfrm>
-          <a:prstGeom prst="rect">
-            <a:avLst/>
-          </a:prstGeom>
-          <a:solidFill>
-            <a:srgbClr val="F2F2F2"/>
-          </a:solidFill>
-          <a:ln>
-            <a:noFill/>
-          </a:ln>
-        </p:spPr>
-        <p:txBody>
-          <a:bodyPr anchorCtr="0" anchor="ctr" bIns="91425" lIns="91425" spcFirstLastPara="1" rIns="91425" wrap="square" tIns="91425">
-            <a:noAutofit/>
-          </a:bodyPr>
-          <a:lstStyle/>
-          <a:p>
-            <a:pPr indent="0" lvl="0" marL="0" rtl="0" algn="l">
-              <a:spcBef>
-                <a:spcPts val="0"/>
-              </a:spcBef>
-              <a:spcAft>
-                <a:spcPts val="0"/>
-              </a:spcAft>
-              <a:buNone/>
-            </a:pPr>
-            <a:r>
-              <a:t/>
-            </a:r>
-            <a:endParaRPr/>
-          </a:p>
-        </p:txBody>
-      </p:sp>
-      <p:sp>
-        <p:nvSpPr>
-          <p:cNvPr id="56" name="Google Shape;56;p7"/>
-          <p:cNvSpPr txBox="1"/>
-          <p:nvPr/>
-        </p:nvSpPr>
-        <p:spPr>
-          <a:xfrm>
-            <a:off x="829824" y="2619071"/>
-            <a:ext cx="3143764" cy="362226"/>
-          </a:xfrm>
-          <a:prstGeom prst="rect">
-            <a:avLst/>
-          </a:prstGeom>
-          <a:noFill/>
-          <a:ln>
-            <a:noFill/>
-          </a:ln>
-        </p:spPr>
-        <p:txBody>
-          <a:bodyPr anchorCtr="0" anchor="t" bIns="0" lIns="0" spcFirstLastPara="1" rIns="0" wrap="square" tIns="0">
-            <a:noAutofit/>
-          </a:bodyPr>
-          <a:lstStyle/>
-          <a:p>
-            <a:pPr indent="0" lvl="0" marL="0" marR="0" rtl="0" algn="l">
-              <a:spcBef>
-                <a:spcPts val="0"/>
-              </a:spcBef>
-              <a:spcAft>
-                <a:spcPts val="0"/>
-              </a:spcAft>
-              <a:buClr>
-                <a:srgbClr val="23323B"/>
-              </a:buClr>
-              <a:buSzPts val="1500"/>
-              <a:buFont typeface="Arial"/>
-              <a:buNone/>
-            </a:pPr>
-            <a:r>
-              <a:rPr b="1" i="0" lang="en-US" sz="1500" u="none" cap="none" strike="noStrike">
-                <a:solidFill>
-                  <a:srgbClr val="23323B"/>
-                </a:solidFill>
-                <a:latin typeface="Arial"/>
-                <a:ea typeface="Arial"/>
-                <a:cs typeface="Arial"/>
-                <a:sym typeface="Arial"/>
-              </a:rPr>
-              <a:t>前提</a:t>
-            </a:r>
-            <a:endParaRPr b="0" i="0" sz="1500" u="none" cap="none" strike="noStrike">
-              <a:solidFill>
-                <a:srgbClr val="000000"/>
-              </a:solidFill>
-              <a:latin typeface="Arial"/>
-              <a:ea typeface="Arial"/>
-              <a:cs typeface="Arial"/>
-              <a:sym typeface="Arial"/>
-            </a:endParaRPr>
-          </a:p>
-        </p:txBody>
-      </p:sp>
-      <p:sp>
-        <p:nvSpPr>
-          <p:cNvPr id="57" name="Google Shape;57;p7"/>
-          <p:cNvSpPr txBox="1"/>
-          <p:nvPr/>
-        </p:nvSpPr>
-        <p:spPr>
-          <a:xfrm>
-            <a:off x="829824" y="2999408"/>
-            <a:ext cx="3143764" cy="271669"/>
-          </a:xfrm>
-          <a:prstGeom prst="rect">
-            <a:avLst/>
-          </a:prstGeom>
-          <a:noFill/>
-          <a:ln>
-            <a:noFill/>
-          </a:ln>
-        </p:spPr>
-        <p:txBody>
-          <a:bodyPr anchorCtr="0" anchor="t" bIns="0" lIns="0" spcFirstLastPara="1" rIns="0" wrap="square" tIns="0">
-            <a:noAutofit/>
-          </a:bodyPr>
-          <a:lstStyle/>
-          <a:p>
-            <a:pPr indent="0" lvl="0" marL="0" marR="0" rtl="0" algn="l">
-              <a:spcBef>
-                <a:spcPts val="0"/>
-              </a:spcBef>
-              <a:spcAft>
-                <a:spcPts val="0"/>
-              </a:spcAft>
-              <a:buClr>
-                <a:srgbClr val="404040"/>
-              </a:buClr>
-              <a:buSzPts val="1100"/>
-              <a:buFont typeface="Arial"/>
-              <a:buNone/>
-            </a:pPr>
-            <a:r>
-              <a:rPr b="1" i="0" lang="en-US" sz="1100" u="none" cap="none" strike="noStrike">
-                <a:solidFill>
-                  <a:srgbClr val="404040"/>
-                </a:solidFill>
-                <a:latin typeface="Arial"/>
-                <a:ea typeface="Arial"/>
-                <a:cs typeface="Arial"/>
-                <a:sym typeface="Arial"/>
-              </a:rPr>
-              <a:t>全社の方針として決定済み</a:t>
-            </a:r>
-            <a:endParaRPr b="0" i="0" sz="1100" u="none" cap="none" strike="noStrike">
-              <a:solidFill>
-                <a:srgbClr val="000000"/>
-              </a:solidFill>
-              <a:latin typeface="Arial"/>
-              <a:ea typeface="Arial"/>
-              <a:cs typeface="Arial"/>
-              <a:sym typeface="Arial"/>
-            </a:endParaRPr>
-          </a:p>
-        </p:txBody>
-      </p:sp>
-      <p:sp>
-        <p:nvSpPr>
-          <p:cNvPr id="58" name="Google Shape;58;p7"/>
-          <p:cNvSpPr txBox="1"/>
-          <p:nvPr/>
-        </p:nvSpPr>
-        <p:spPr>
-          <a:xfrm>
-            <a:off x="829824" y="3379746"/>
-            <a:ext cx="3143764" cy="2852530"/>
-          </a:xfrm>
-          <a:prstGeom prst="rect">
-            <a:avLst/>
-          </a:prstGeom>
-          <a:noFill/>
-          <a:ln>
-            <a:noFill/>
-          </a:ln>
-        </p:spPr>
-        <p:txBody>
-          <a:bodyPr anchorCtr="0" anchor="t" bIns="0" lIns="0" spcFirstLastPara="1" rIns="0" wrap="square" tIns="0">
-            <a:noAutofit/>
-          </a:bodyPr>
-          <a:lstStyle/>
-          <a:p>
-            <a:pPr indent="-152400" lvl="0" marL="152400" marR="0" rtl="0" algn="l">
-              <a:spcBef>
-                <a:spcPts val="0"/>
-              </a:spcBef>
-              <a:spcAft>
-                <a:spcPts val="0"/>
-              </a:spcAft>
-              <a:buClr>
-                <a:srgbClr val="000000"/>
-              </a:buClr>
-              <a:buSzPts val="1200"/>
-              <a:buFont typeface="Arial"/>
-              <a:buChar char="•"/>
-            </a:pPr>
-            <a:r>
-              <a:rPr b="0" i="0" lang="en-US" sz="1200" u="none" cap="none" strike="noStrike">
-                <a:solidFill>
-                  <a:srgbClr val="000000"/>
-                </a:solidFill>
-                <a:latin typeface="Arial"/>
-                <a:ea typeface="Arial"/>
-                <a:cs typeface="Arial"/>
-                <a:sym typeface="Arial"/>
-              </a:rPr>
-              <a:t>経営で決定済み。全社向けの予算策定ガイドラインに明記されている</a:t>
-            </a:r>
-            <a:endParaRPr b="0" i="0" sz="1100" u="none" cap="none" strike="noStrike">
-              <a:solidFill>
-                <a:srgbClr val="000000"/>
-              </a:solidFill>
-              <a:latin typeface="Arial"/>
-              <a:ea typeface="Arial"/>
-              <a:cs typeface="Arial"/>
-              <a:sym typeface="Arial"/>
-            </a:endParaRPr>
-          </a:p>
-          <a:p>
-            <a:pPr indent="-152400" lvl="0" marL="152400" marR="0" rtl="0" algn="l">
-              <a:spcBef>
-                <a:spcPts val="300"/>
-              </a:spcBef>
-              <a:spcAft>
-                <a:spcPts val="0"/>
-              </a:spcAft>
-              <a:buClr>
-                <a:srgbClr val="000000"/>
-              </a:buClr>
-              <a:buSzPts val="1200"/>
-              <a:buFont typeface="Arial"/>
-              <a:buChar char="•"/>
-            </a:pPr>
-            <a:r>
-              <a:rPr b="0" i="0" lang="en-US" sz="1200" u="none" cap="none" strike="noStrike">
-                <a:solidFill>
-                  <a:srgbClr val="000000"/>
-                </a:solidFill>
-                <a:latin typeface="Arial"/>
-                <a:ea typeface="Arial"/>
-                <a:cs typeface="Arial"/>
-                <a:sym typeface="Arial"/>
-              </a:rPr>
-              <a:t>対象は営業部門以外の部門（人事・総務・財務を含む）。各部門には案内済み</a:t>
-            </a:r>
-            <a:endParaRPr b="0" i="0" sz="1100" u="none" cap="none" strike="noStrike">
-              <a:solidFill>
-                <a:srgbClr val="000000"/>
-              </a:solidFill>
-              <a:latin typeface="Arial"/>
-              <a:ea typeface="Arial"/>
-              <a:cs typeface="Arial"/>
-              <a:sym typeface="Arial"/>
-            </a:endParaRPr>
-          </a:p>
-          <a:p>
-            <a:pPr indent="-152400" lvl="0" marL="152400" marR="0" rtl="0" algn="l">
-              <a:spcBef>
-                <a:spcPts val="300"/>
-              </a:spcBef>
-              <a:spcAft>
-                <a:spcPts val="0"/>
-              </a:spcAft>
-              <a:buClr>
-                <a:srgbClr val="000000"/>
-              </a:buClr>
-              <a:buSzPts val="1200"/>
-              <a:buFont typeface="Arial"/>
-              <a:buChar char="•"/>
-            </a:pPr>
-            <a:r>
-              <a:rPr b="0" i="0" lang="en-US" sz="1200" u="none" cap="none" strike="noStrike">
-                <a:solidFill>
-                  <a:srgbClr val="000000"/>
-                </a:solidFill>
-                <a:latin typeface="Arial"/>
-                <a:ea typeface="Arial"/>
-                <a:cs typeface="Arial"/>
-                <a:sym typeface="Arial"/>
-              </a:rPr>
-              <a:t>範囲は、業務アプリケーションとその関連ツールの予算・契約・間接業務</a:t>
-            </a:r>
-            <a:endParaRPr b="0" i="0" sz="1100" u="none" cap="none" strike="noStrike">
-              <a:solidFill>
-                <a:srgbClr val="000000"/>
-              </a:solidFill>
-              <a:latin typeface="Arial"/>
-              <a:ea typeface="Arial"/>
-              <a:cs typeface="Arial"/>
-              <a:sym typeface="Arial"/>
-            </a:endParaRPr>
-          </a:p>
-        </p:txBody>
-      </p:sp>
-      <p:sp>
-        <p:nvSpPr>
-          <p:cNvPr id="59" name="Google Shape;59;p7"/>
-          <p:cNvSpPr/>
-          <p:nvPr/>
-        </p:nvSpPr>
-        <p:spPr>
-          <a:xfrm>
-            <a:off x="4327816" y="2456069"/>
-            <a:ext cx="3533414" cy="3893930"/>
-          </a:xfrm>
-          <a:prstGeom prst="rect">
-            <a:avLst/>
-          </a:prstGeom>
-          <a:solidFill>
-            <a:srgbClr val="F2F2F2"/>
-          </a:solidFill>
-          <a:ln>
-            <a:noFill/>
-          </a:ln>
-        </p:spPr>
-        <p:txBody>
-          <a:bodyPr anchorCtr="0" anchor="ctr" bIns="91425" lIns="91425" spcFirstLastPara="1" rIns="91425" wrap="square" tIns="91425">
-            <a:noAutofit/>
-          </a:bodyPr>
-          <a:lstStyle/>
-          <a:p>
-            <a:pPr indent="0" lvl="0" marL="0" rtl="0" algn="l">
-              <a:spcBef>
-                <a:spcPts val="0"/>
-              </a:spcBef>
-              <a:spcAft>
-                <a:spcPts val="0"/>
-              </a:spcAft>
-              <a:buNone/>
-            </a:pPr>
-            <a:r>
-              <a:t/>
-            </a:r>
-            <a:endParaRPr/>
-          </a:p>
-        </p:txBody>
-      </p:sp>
-      <p:sp>
-        <p:nvSpPr>
-          <p:cNvPr id="60" name="Google Shape;60;p7"/>
-          <p:cNvSpPr txBox="1"/>
-          <p:nvPr/>
-        </p:nvSpPr>
-        <p:spPr>
-          <a:xfrm>
-            <a:off x="4522641" y="2619071"/>
-            <a:ext cx="3143764" cy="362226"/>
-          </a:xfrm>
-          <a:prstGeom prst="rect">
-            <a:avLst/>
-          </a:prstGeom>
-          <a:noFill/>
-          <a:ln>
-            <a:noFill/>
-          </a:ln>
-        </p:spPr>
-        <p:txBody>
-          <a:bodyPr anchorCtr="0" anchor="t" bIns="0" lIns="0" spcFirstLastPara="1" rIns="0" wrap="square" tIns="0">
-            <a:noAutofit/>
-          </a:bodyPr>
-          <a:lstStyle/>
-          <a:p>
-            <a:pPr indent="0" lvl="0" marL="0" marR="0" rtl="0" algn="l">
-              <a:spcBef>
-                <a:spcPts val="0"/>
-              </a:spcBef>
-              <a:spcAft>
-                <a:spcPts val="0"/>
-              </a:spcAft>
-              <a:buClr>
-                <a:srgbClr val="23323B"/>
-              </a:buClr>
-              <a:buSzPts val="1500"/>
-              <a:buFont typeface="Arial"/>
-              <a:buNone/>
-            </a:pPr>
-            <a:r>
-              <a:rPr b="1" i="0" lang="en-US" sz="1500" u="none" cap="none" strike="noStrike">
-                <a:solidFill>
-                  <a:srgbClr val="23323B"/>
-                </a:solidFill>
-                <a:latin typeface="Arial"/>
-                <a:ea typeface="Arial"/>
-                <a:cs typeface="Arial"/>
-                <a:sym typeface="Arial"/>
-              </a:rPr>
-              <a:t>方針</a:t>
-            </a:r>
-            <a:endParaRPr b="0" i="0" sz="1500" u="none" cap="none" strike="noStrike">
-              <a:solidFill>
-                <a:srgbClr val="000000"/>
-              </a:solidFill>
-              <a:latin typeface="Arial"/>
-              <a:ea typeface="Arial"/>
-              <a:cs typeface="Arial"/>
-              <a:sym typeface="Arial"/>
-            </a:endParaRPr>
-          </a:p>
-        </p:txBody>
-      </p:sp>
-      <p:sp>
-        <p:nvSpPr>
-          <p:cNvPr id="61" name="Google Shape;61;p7"/>
-          <p:cNvSpPr txBox="1"/>
-          <p:nvPr/>
-        </p:nvSpPr>
-        <p:spPr>
-          <a:xfrm>
-            <a:off x="4522641" y="2999408"/>
-            <a:ext cx="3143764" cy="271669"/>
-          </a:xfrm>
-          <a:prstGeom prst="rect">
-            <a:avLst/>
-          </a:prstGeom>
-          <a:noFill/>
-          <a:ln>
-            <a:noFill/>
-          </a:ln>
-        </p:spPr>
-        <p:txBody>
-          <a:bodyPr anchorCtr="0" anchor="t" bIns="0" lIns="0" spcFirstLastPara="1" rIns="0" wrap="square" tIns="0">
-            <a:noAutofit/>
-          </a:bodyPr>
-          <a:lstStyle/>
-          <a:p>
-            <a:pPr indent="0" lvl="0" marL="0" marR="0" rtl="0" algn="l">
-              <a:spcBef>
-                <a:spcPts val="0"/>
-              </a:spcBef>
-              <a:spcAft>
-                <a:spcPts val="0"/>
-              </a:spcAft>
-              <a:buClr>
-                <a:srgbClr val="404040"/>
-              </a:buClr>
-              <a:buSzPts val="1100"/>
-              <a:buFont typeface="Arial"/>
-              <a:buNone/>
-            </a:pPr>
-            <a:r>
-              <a:rPr b="1" i="0" lang="en-US" sz="1100" u="none" cap="none" strike="noStrike">
-                <a:solidFill>
-                  <a:srgbClr val="404040"/>
-                </a:solidFill>
-                <a:latin typeface="Arial"/>
-                <a:ea typeface="Arial"/>
-                <a:cs typeface="Arial"/>
-                <a:sym typeface="Arial"/>
-              </a:rPr>
-              <a:t>移す時期によって、予算を3つに分ける</a:t>
-            </a:r>
-            <a:endParaRPr b="0" i="0" sz="1100" u="none" cap="none" strike="noStrike">
-              <a:solidFill>
-                <a:srgbClr val="000000"/>
-              </a:solidFill>
-              <a:latin typeface="Arial"/>
-              <a:ea typeface="Arial"/>
-              <a:cs typeface="Arial"/>
-              <a:sym typeface="Arial"/>
-            </a:endParaRPr>
-          </a:p>
-        </p:txBody>
-      </p:sp>
-      <p:sp>
-        <p:nvSpPr>
-          <p:cNvPr id="62" name="Google Shape;62;p7"/>
-          <p:cNvSpPr txBox="1"/>
-          <p:nvPr/>
-        </p:nvSpPr>
-        <p:spPr>
-          <a:xfrm>
-            <a:off x="4522641" y="3379746"/>
-            <a:ext cx="3143764" cy="2852530"/>
-          </a:xfrm>
-          <a:prstGeom prst="rect">
-            <a:avLst/>
-          </a:prstGeom>
-          <a:noFill/>
-          <a:ln>
-            <a:noFill/>
-          </a:ln>
-        </p:spPr>
-        <p:txBody>
-          <a:bodyPr anchorCtr="0" anchor="t" bIns="0" lIns="0" spcFirstLastPara="1" rIns="0" wrap="square" tIns="0">
-            <a:noAutofit/>
-          </a:bodyPr>
-          <a:lstStyle/>
-          <a:p>
-            <a:pPr indent="0" lvl="0" marL="0" marR="0" rtl="0" algn="l">
-              <a:spcBef>
-                <a:spcPts val="600"/>
-              </a:spcBef>
-              <a:spcAft>
-                <a:spcPts val="0"/>
-              </a:spcAft>
-              <a:buClr>
-                <a:srgbClr val="000000"/>
-              </a:buClr>
-              <a:buSzPts val="1150"/>
-              <a:buFont typeface="Arial"/>
-              <a:buNone/>
-            </a:pPr>
-            <a:r>
-              <a:rPr b="1" i="0" lang="en-US" sz="1150" u="none" cap="none" strike="noStrike">
-                <a:solidFill>
-                  <a:srgbClr val="000000"/>
-                </a:solidFill>
-                <a:latin typeface="Arial"/>
-                <a:ea typeface="Arial"/>
-                <a:cs typeface="Arial"/>
-                <a:sym typeface="Arial"/>
-              </a:rPr>
-              <a:t>2027年1月1日にそろって移す</a:t>
-            </a:r>
-            <a:endParaRPr b="0" i="0" sz="1100" u="none" cap="none" strike="noStrike">
-              <a:solidFill>
-                <a:srgbClr val="000000"/>
-              </a:solidFill>
-              <a:latin typeface="Arial"/>
-              <a:ea typeface="Arial"/>
-              <a:cs typeface="Arial"/>
-              <a:sym typeface="Arial"/>
-            </a:endParaRPr>
-          </a:p>
-          <a:p>
-            <a:pPr indent="-152400" lvl="0" marL="152400" marR="0" rtl="0" algn="l">
-              <a:spcBef>
-                <a:spcPts val="0"/>
-              </a:spcBef>
-              <a:spcAft>
-                <a:spcPts val="0"/>
-              </a:spcAft>
-              <a:buClr>
-                <a:srgbClr val="000000"/>
-              </a:buClr>
-              <a:buSzPts val="1150"/>
-              <a:buFont typeface="Arial"/>
-              <a:buChar char="•"/>
-            </a:pPr>
-            <a:r>
-              <a:rPr b="0" i="0" lang="en-US" sz="1150" u="none" cap="none" strike="noStrike">
-                <a:solidFill>
-                  <a:srgbClr val="000000"/>
-                </a:solidFill>
-                <a:latin typeface="Arial"/>
-                <a:ea typeface="Arial"/>
-                <a:cs typeface="Arial"/>
-                <a:sym typeface="Arial"/>
-              </a:rPr>
-              <a:t>経費予算（保守・ライセンス・クラウド利用料・業務委託などの運用費用）</a:t>
-            </a:r>
-            <a:endParaRPr b="0" i="0" sz="1100" u="none" cap="none" strike="noStrike">
-              <a:solidFill>
-                <a:srgbClr val="000000"/>
-              </a:solidFill>
-              <a:latin typeface="Arial"/>
-              <a:ea typeface="Arial"/>
-              <a:cs typeface="Arial"/>
-              <a:sym typeface="Arial"/>
-            </a:endParaRPr>
-          </a:p>
-          <a:p>
-            <a:pPr indent="0" lvl="0" marL="0" marR="0" rtl="0" algn="l">
-              <a:spcBef>
-                <a:spcPts val="600"/>
-              </a:spcBef>
-              <a:spcAft>
-                <a:spcPts val="0"/>
-              </a:spcAft>
-              <a:buClr>
-                <a:srgbClr val="000000"/>
-              </a:buClr>
-              <a:buSzPts val="1150"/>
-              <a:buFont typeface="Arial"/>
-              <a:buNone/>
-            </a:pPr>
-            <a:r>
-              <a:rPr b="1" i="0" lang="en-US" sz="1150" u="none" cap="none" strike="noStrike">
-                <a:solidFill>
-                  <a:srgbClr val="000000"/>
-                </a:solidFill>
-                <a:latin typeface="Arial"/>
-                <a:ea typeface="Arial"/>
-                <a:cs typeface="Arial"/>
-                <a:sym typeface="Arial"/>
-              </a:rPr>
-              <a:t>来年度予算から GDSが持つ</a:t>
-            </a:r>
-            <a:endParaRPr b="0" i="0" sz="1100" u="none" cap="none" strike="noStrike">
-              <a:solidFill>
-                <a:srgbClr val="000000"/>
-              </a:solidFill>
-              <a:latin typeface="Arial"/>
-              <a:ea typeface="Arial"/>
-              <a:cs typeface="Arial"/>
-              <a:sym typeface="Arial"/>
-            </a:endParaRPr>
-          </a:p>
-          <a:p>
-            <a:pPr indent="-152400" lvl="0" marL="152400" marR="0" rtl="0" algn="l">
-              <a:spcBef>
-                <a:spcPts val="0"/>
-              </a:spcBef>
-              <a:spcAft>
-                <a:spcPts val="0"/>
-              </a:spcAft>
-              <a:buClr>
-                <a:srgbClr val="000000"/>
-              </a:buClr>
-              <a:buSzPts val="1150"/>
-              <a:buFont typeface="Arial"/>
-              <a:buChar char="•"/>
-            </a:pPr>
-            <a:r>
-              <a:rPr b="0" i="0" lang="en-US" sz="1150" u="none" cap="none" strike="noStrike">
-                <a:solidFill>
-                  <a:srgbClr val="000000"/>
-                </a:solidFill>
-                <a:latin typeface="Arial"/>
-                <a:ea typeface="Arial"/>
-                <a:cs typeface="Arial"/>
-                <a:sym typeface="Arial"/>
-              </a:rPr>
-              <a:t>来年度に始める IT投資案件の予算</a:t>
-            </a:r>
-            <a:endParaRPr b="0" i="0" sz="1100" u="none" cap="none" strike="noStrike">
-              <a:solidFill>
-                <a:srgbClr val="000000"/>
-              </a:solidFill>
-              <a:latin typeface="Arial"/>
-              <a:ea typeface="Arial"/>
-              <a:cs typeface="Arial"/>
-              <a:sym typeface="Arial"/>
-            </a:endParaRPr>
-          </a:p>
-          <a:p>
-            <a:pPr indent="0" lvl="0" marL="0" marR="0" rtl="0" algn="l">
-              <a:spcBef>
-                <a:spcPts val="600"/>
-              </a:spcBef>
-              <a:spcAft>
-                <a:spcPts val="0"/>
-              </a:spcAft>
-              <a:buClr>
-                <a:srgbClr val="000000"/>
-              </a:buClr>
-              <a:buSzPts val="1150"/>
-              <a:buFont typeface="Arial"/>
-              <a:buNone/>
-            </a:pPr>
-            <a:r>
-              <a:rPr b="1" i="0" lang="en-US" sz="1150" u="none" cap="none" strike="noStrike">
-                <a:solidFill>
-                  <a:srgbClr val="000000"/>
-                </a:solidFill>
-                <a:latin typeface="Arial"/>
-                <a:ea typeface="Arial"/>
-                <a:cs typeface="Arial"/>
-                <a:sym typeface="Arial"/>
-              </a:rPr>
-              <a:t>移す時期を案件ごとに合意する</a:t>
-            </a:r>
-            <a:endParaRPr b="0" i="0" sz="1100" u="none" cap="none" strike="noStrike">
-              <a:solidFill>
-                <a:srgbClr val="000000"/>
-              </a:solidFill>
-              <a:latin typeface="Arial"/>
-              <a:ea typeface="Arial"/>
-              <a:cs typeface="Arial"/>
-              <a:sym typeface="Arial"/>
-            </a:endParaRPr>
-          </a:p>
-          <a:p>
-            <a:pPr indent="-152400" lvl="0" marL="152400" marR="0" rtl="0" algn="l">
-              <a:spcBef>
-                <a:spcPts val="0"/>
-              </a:spcBef>
-              <a:spcAft>
-                <a:spcPts val="0"/>
-              </a:spcAft>
-              <a:buClr>
-                <a:srgbClr val="000000"/>
-              </a:buClr>
-              <a:buSzPts val="1150"/>
-              <a:buFont typeface="Arial"/>
-              <a:buChar char="•"/>
-            </a:pPr>
-            <a:r>
-              <a:rPr b="0" i="0" lang="en-US" sz="1150" u="none" cap="none" strike="noStrike">
-                <a:solidFill>
-                  <a:srgbClr val="000000"/>
-                </a:solidFill>
-                <a:latin typeface="Arial"/>
-                <a:ea typeface="Arial"/>
-                <a:cs typeface="Arial"/>
-                <a:sym typeface="Arial"/>
-              </a:rPr>
-              <a:t>今年度から続く IT投資案件（取得済みの資産、建設仮勘定、着手済みのもの）。時期は移管元と合意し、財務経理と確認する（7枚目）</a:t>
-            </a:r>
-            <a:endParaRPr b="0" i="0" sz="1100" u="none" cap="none" strike="noStrike">
-              <a:solidFill>
-                <a:srgbClr val="000000"/>
-              </a:solidFill>
-              <a:latin typeface="Arial"/>
-              <a:ea typeface="Arial"/>
-              <a:cs typeface="Arial"/>
-              <a:sym typeface="Arial"/>
-            </a:endParaRPr>
-          </a:p>
-        </p:txBody>
-      </p:sp>
-      <p:sp>
-        <p:nvSpPr>
-          <p:cNvPr id="63" name="Google Shape;63;p7"/>
-          <p:cNvSpPr/>
-          <p:nvPr/>
-        </p:nvSpPr>
-        <p:spPr>
-          <a:xfrm>
-            <a:off x="8020633" y="2456069"/>
-            <a:ext cx="3533414" cy="3893930"/>
-          </a:xfrm>
-          <a:prstGeom prst="rect">
-            <a:avLst/>
-          </a:prstGeom>
-          <a:solidFill>
-            <a:srgbClr val="F2F2F2"/>
-          </a:solidFill>
-          <a:ln>
-            <a:noFill/>
-          </a:ln>
-        </p:spPr>
-        <p:txBody>
-          <a:bodyPr anchorCtr="0" anchor="ctr" bIns="91425" lIns="91425" spcFirstLastPara="1" rIns="91425" wrap="square" tIns="91425">
-            <a:noAutofit/>
-          </a:bodyPr>
-          <a:lstStyle/>
-          <a:p>
-            <a:pPr indent="0" lvl="0" marL="0" rtl="0" algn="l">
-              <a:spcBef>
-                <a:spcPts val="0"/>
-              </a:spcBef>
-              <a:spcAft>
-                <a:spcPts val="0"/>
-              </a:spcAft>
-              <a:buNone/>
-            </a:pPr>
-            <a:r>
-              <a:t/>
-            </a:r>
-            <a:endParaRPr/>
-          </a:p>
-        </p:txBody>
-      </p:sp>
-      <p:sp>
-        <p:nvSpPr>
-          <p:cNvPr id="64" name="Google Shape;64;p7"/>
-          <p:cNvSpPr txBox="1"/>
-          <p:nvPr/>
-        </p:nvSpPr>
-        <p:spPr>
-          <a:xfrm>
-            <a:off x="8215458" y="2619071"/>
-            <a:ext cx="3143764" cy="362226"/>
-          </a:xfrm>
-          <a:prstGeom prst="rect">
-            <a:avLst/>
-          </a:prstGeom>
-          <a:noFill/>
-          <a:ln>
-            <a:noFill/>
-          </a:ln>
-        </p:spPr>
-        <p:txBody>
-          <a:bodyPr anchorCtr="0" anchor="t" bIns="0" lIns="0" spcFirstLastPara="1" rIns="0" wrap="square" tIns="0">
-            <a:noAutofit/>
-          </a:bodyPr>
-          <a:lstStyle/>
-          <a:p>
-            <a:pPr indent="0" lvl="0" marL="0" marR="0" rtl="0" algn="l">
-              <a:spcBef>
-                <a:spcPts val="0"/>
-              </a:spcBef>
-              <a:spcAft>
-                <a:spcPts val="0"/>
-              </a:spcAft>
-              <a:buClr>
-                <a:srgbClr val="23323B"/>
-              </a:buClr>
-              <a:buSzPts val="1500"/>
-              <a:buFont typeface="Arial"/>
-              <a:buNone/>
-            </a:pPr>
-            <a:r>
-              <a:rPr b="1" i="0" lang="en-US" sz="1500" u="none" cap="none" strike="noStrike">
-                <a:solidFill>
-                  <a:srgbClr val="23323B"/>
-                </a:solidFill>
-                <a:latin typeface="Arial"/>
-                <a:ea typeface="Arial"/>
-                <a:cs typeface="Arial"/>
-                <a:sym typeface="Arial"/>
-              </a:rPr>
-              <a:t>目標</a:t>
-            </a:r>
-            <a:endParaRPr b="0" i="0" sz="1500" u="none" cap="none" strike="noStrike">
-              <a:solidFill>
-                <a:srgbClr val="000000"/>
-              </a:solidFill>
-              <a:latin typeface="Arial"/>
-              <a:ea typeface="Arial"/>
-              <a:cs typeface="Arial"/>
-              <a:sym typeface="Arial"/>
-            </a:endParaRPr>
-          </a:p>
-        </p:txBody>
-      </p:sp>
-      <p:sp>
-        <p:nvSpPr>
-          <p:cNvPr id="65" name="Google Shape;65;p7"/>
-          <p:cNvSpPr txBox="1"/>
-          <p:nvPr/>
-        </p:nvSpPr>
-        <p:spPr>
-          <a:xfrm>
-            <a:off x="8215458" y="2999408"/>
-            <a:ext cx="3143764" cy="271669"/>
-          </a:xfrm>
-          <a:prstGeom prst="rect">
-            <a:avLst/>
-          </a:prstGeom>
-          <a:noFill/>
-          <a:ln>
-            <a:noFill/>
-          </a:ln>
-        </p:spPr>
-        <p:txBody>
-          <a:bodyPr anchorCtr="0" anchor="t" bIns="0" lIns="0" spcFirstLastPara="1" rIns="0" wrap="square" tIns="0">
-            <a:noAutofit/>
-          </a:bodyPr>
-          <a:lstStyle/>
-          <a:p>
-            <a:pPr indent="0" lvl="0" marL="0" marR="0" rtl="0" algn="l">
-              <a:spcBef>
-                <a:spcPts val="0"/>
-              </a:spcBef>
-              <a:spcAft>
-                <a:spcPts val="0"/>
-              </a:spcAft>
-              <a:buClr>
-                <a:srgbClr val="404040"/>
-              </a:buClr>
-              <a:buSzPts val="1100"/>
-              <a:buFont typeface="Arial"/>
-              <a:buNone/>
-            </a:pPr>
-            <a:r>
-              <a:rPr b="1" i="0" lang="en-US" sz="1100" u="none" cap="none" strike="noStrike">
-                <a:solidFill>
-                  <a:srgbClr val="404040"/>
-                </a:solidFill>
-                <a:latin typeface="Arial"/>
-                <a:ea typeface="Arial"/>
-                <a:cs typeface="Arial"/>
-                <a:sym typeface="Arial"/>
-              </a:rPr>
-              <a:t>12月末に、移管の稟議が承認されている</a:t>
-            </a:r>
-            <a:endParaRPr b="0" i="0" sz="1100" u="none" cap="none" strike="noStrike">
-              <a:solidFill>
-                <a:srgbClr val="000000"/>
-              </a:solidFill>
-              <a:latin typeface="Arial"/>
-              <a:ea typeface="Arial"/>
-              <a:cs typeface="Arial"/>
-              <a:sym typeface="Arial"/>
-            </a:endParaRPr>
-          </a:p>
-        </p:txBody>
-      </p:sp>
-      <p:sp>
-        <p:nvSpPr>
-          <p:cNvPr id="66" name="Google Shape;66;p7"/>
-          <p:cNvSpPr txBox="1"/>
-          <p:nvPr/>
-        </p:nvSpPr>
-        <p:spPr>
-          <a:xfrm>
-            <a:off x="8215458" y="3379746"/>
-            <a:ext cx="3143764" cy="2852530"/>
-          </a:xfrm>
-          <a:prstGeom prst="rect">
-            <a:avLst/>
-          </a:prstGeom>
-          <a:noFill/>
-          <a:ln>
-            <a:noFill/>
-          </a:ln>
-        </p:spPr>
-        <p:txBody>
-          <a:bodyPr anchorCtr="0" anchor="t" bIns="0" lIns="0" spcFirstLastPara="1" rIns="0" wrap="square" tIns="0">
-            <a:noAutofit/>
-          </a:bodyPr>
-          <a:lstStyle/>
-          <a:p>
-            <a:pPr indent="0" lvl="0" marL="0" marR="0" rtl="0" algn="l">
-              <a:spcBef>
-                <a:spcPts val="600"/>
-              </a:spcBef>
-              <a:spcAft>
-                <a:spcPts val="0"/>
-              </a:spcAft>
-              <a:buClr>
-                <a:srgbClr val="23323B"/>
-              </a:buClr>
-              <a:buSzPts val="1200"/>
-              <a:buFont typeface="Arial"/>
-              <a:buNone/>
-            </a:pPr>
-            <a:r>
-              <a:rPr b="1" i="0" lang="en-US" sz="1200" u="none" cap="none" strike="noStrike">
-                <a:solidFill>
-                  <a:srgbClr val="23323B"/>
-                </a:solidFill>
-                <a:latin typeface="Arial"/>
-                <a:ea typeface="Arial"/>
-                <a:cs typeface="Arial"/>
-                <a:sym typeface="Arial"/>
-              </a:rPr>
-              <a:t>12月末までに終わっていること</a:t>
-            </a:r>
-            <a:endParaRPr b="0" i="0" sz="1100" u="none" cap="none" strike="noStrike">
-              <a:solidFill>
-                <a:srgbClr val="000000"/>
-              </a:solidFill>
-              <a:latin typeface="Arial"/>
-              <a:ea typeface="Arial"/>
-              <a:cs typeface="Arial"/>
-              <a:sym typeface="Arial"/>
-            </a:endParaRPr>
-          </a:p>
-          <a:p>
-            <a:pPr indent="-152400" lvl="0" marL="152400" marR="0" rtl="0" algn="l">
-              <a:spcBef>
-                <a:spcPts val="0"/>
-              </a:spcBef>
-              <a:spcAft>
-                <a:spcPts val="0"/>
-              </a:spcAft>
-              <a:buClr>
-                <a:srgbClr val="000000"/>
-              </a:buClr>
-              <a:buSzPts val="1200"/>
-              <a:buFont typeface="Arial"/>
-              <a:buChar char="•"/>
-            </a:pPr>
-            <a:r>
-              <a:rPr b="0" i="0" lang="en-US" sz="1200" u="none" cap="none" strike="noStrike">
-                <a:solidFill>
-                  <a:srgbClr val="000000"/>
-                </a:solidFill>
-                <a:latin typeface="Arial"/>
-                <a:ea typeface="Arial"/>
-                <a:cs typeface="Arial"/>
-                <a:sym typeface="Arial"/>
-              </a:rPr>
-              <a:t>稟議に必要な情報（移管する予算と契約、来年度予算、合意文書）が整理されている</a:t>
-            </a:r>
-            <a:endParaRPr b="0" i="0" sz="1100" u="none" cap="none" strike="noStrike">
-              <a:solidFill>
-                <a:srgbClr val="000000"/>
-              </a:solidFill>
-              <a:latin typeface="Arial"/>
-              <a:ea typeface="Arial"/>
-              <a:cs typeface="Arial"/>
-              <a:sym typeface="Arial"/>
-            </a:endParaRPr>
-          </a:p>
-          <a:p>
-            <a:pPr indent="-152400" lvl="0" marL="152400" marR="0" rtl="0" algn="l">
-              <a:spcBef>
-                <a:spcPts val="0"/>
-              </a:spcBef>
-              <a:spcAft>
-                <a:spcPts val="0"/>
-              </a:spcAft>
-              <a:buClr>
-                <a:srgbClr val="000000"/>
-              </a:buClr>
-              <a:buSzPts val="1200"/>
-              <a:buFont typeface="Arial"/>
-              <a:buChar char="•"/>
-            </a:pPr>
-            <a:r>
-              <a:rPr b="0" i="0" lang="en-US" sz="1200" u="none" cap="none" strike="noStrike">
-                <a:solidFill>
-                  <a:srgbClr val="000000"/>
-                </a:solidFill>
-                <a:latin typeface="Arial"/>
-                <a:ea typeface="Arial"/>
-                <a:cs typeface="Arial"/>
-                <a:sym typeface="Arial"/>
-              </a:rPr>
-              <a:t>合意文書に沿って引き継ぎが終わり、1月から GDSが契約の管理と支払いを始められる</a:t>
-            </a:r>
-            <a:endParaRPr b="0" i="0" sz="1100" u="none" cap="none" strike="noStrike">
-              <a:solidFill>
-                <a:srgbClr val="000000"/>
-              </a:solidFill>
-              <a:latin typeface="Arial"/>
-              <a:ea typeface="Arial"/>
-              <a:cs typeface="Arial"/>
-              <a:sym typeface="Arial"/>
-            </a:endParaRPr>
-          </a:p>
-          <a:p>
-            <a:pPr indent="0" lvl="0" marL="0" marR="0" rtl="0" algn="l">
-              <a:spcBef>
-                <a:spcPts val="600"/>
-              </a:spcBef>
-              <a:spcAft>
-                <a:spcPts val="0"/>
-              </a:spcAft>
-              <a:buClr>
-                <a:srgbClr val="23323B"/>
-              </a:buClr>
-              <a:buSzPts val="1200"/>
-              <a:buFont typeface="Arial"/>
-              <a:buNone/>
-            </a:pPr>
-            <a:r>
-              <a:rPr b="1" i="0" lang="en-US" sz="1200" u="none" cap="none" strike="noStrike">
-                <a:solidFill>
-                  <a:srgbClr val="23323B"/>
-                </a:solidFill>
-                <a:latin typeface="Arial"/>
-                <a:ea typeface="Arial"/>
-                <a:cs typeface="Arial"/>
-                <a:sym typeface="Arial"/>
-              </a:rPr>
-              <a:t>移管後に順次対応すること</a:t>
-            </a:r>
-            <a:endParaRPr b="0" i="0" sz="1100" u="none" cap="none" strike="noStrike">
-              <a:solidFill>
-                <a:srgbClr val="000000"/>
-              </a:solidFill>
-              <a:latin typeface="Arial"/>
-              <a:ea typeface="Arial"/>
-              <a:cs typeface="Arial"/>
-              <a:sym typeface="Arial"/>
-            </a:endParaRPr>
-          </a:p>
-          <a:p>
-            <a:pPr indent="-152400" lvl="0" marL="152400" marR="0" rtl="0" algn="l">
-              <a:spcBef>
-                <a:spcPts val="0"/>
-              </a:spcBef>
-              <a:spcAft>
-                <a:spcPts val="0"/>
-              </a:spcAft>
-              <a:buClr>
-                <a:srgbClr val="000000"/>
-              </a:buClr>
-              <a:buSzPts val="1200"/>
-              <a:buFont typeface="Arial"/>
-              <a:buChar char="•"/>
-            </a:pPr>
-            <a:r>
-              <a:rPr b="0" i="0" lang="en-US" sz="1200" u="none" cap="none" strike="noStrike">
-                <a:solidFill>
-                  <a:srgbClr val="000000"/>
-                </a:solidFill>
-                <a:latin typeface="Arial"/>
-                <a:ea typeface="Arial"/>
-                <a:cs typeface="Arial"/>
-                <a:sym typeface="Arial"/>
-              </a:rPr>
-              <a:t>担当の変更に正式な手続き（SOP の改訂、GxP の変更管理など）が要る業務は、手続きが終わるまで今の担当が続ける（経過措置）。業務と完了予定は合意文書に残す</a:t>
-            </a:r>
-            <a:endParaRPr b="0" i="0" sz="1100" u="none" cap="none" strike="noStrike">
-              <a:solidFill>
-                <a:srgbClr val="000000"/>
-              </a:solidFill>
-              <a:latin typeface="Arial"/>
-              <a:ea typeface="Arial"/>
-              <a:cs typeface="Arial"/>
-              <a:sym typeface="Arial"/>
-            </a:endParaRPr>
-          </a:p>
-          <a:p>
-            <a:pPr indent="-152400" lvl="0" marL="152400" marR="0" rtl="0" algn="l">
-              <a:spcBef>
-                <a:spcPts val="0"/>
-              </a:spcBef>
-              <a:spcAft>
-                <a:spcPts val="0"/>
-              </a:spcAft>
-              <a:buClr>
-                <a:srgbClr val="000000"/>
-              </a:buClr>
-              <a:buSzPts val="1200"/>
-              <a:buFont typeface="Arial"/>
-              <a:buChar char="•"/>
-            </a:pPr>
-            <a:r>
-              <a:rPr b="0" i="0" lang="en-US" sz="1200" u="none" cap="none" strike="noStrike">
-                <a:solidFill>
-                  <a:srgbClr val="000000"/>
-                </a:solidFill>
-                <a:latin typeface="Arial"/>
-                <a:ea typeface="Arial"/>
-                <a:cs typeface="Arial"/>
-                <a:sym typeface="Arial"/>
-              </a:rPr>
-              <a:t>契約の署名者は次回の更新から GDSに変わる。請求書の宛名の変更は2月初旬までに相手先に連絡する</a:t>
-            </a:r>
-            <a:endParaRPr b="0" i="0" sz="1100" u="none" cap="none" strike="noStrike">
-              <a:solidFill>
-                <a:srgbClr val="000000"/>
-              </a:solidFill>
-              <a:latin typeface="Arial"/>
-              <a:ea typeface="Arial"/>
-              <a:cs typeface="Arial"/>
-              <a:sym typeface="Arial"/>
-            </a:endParaRPr>
-          </a:p>
-        </p:txBody>
-      </p:sp>
-      <p:sp>
-        <p:nvSpPr>
           <p:cNvPr id="67" name="Google Shape;67;p7"/>
           <p:cNvSpPr txBox="1"/>
           <p:nvPr>
@@ -7301,6 +6782,1158 @@
               <a:cs typeface="Arial"/>
               <a:sym typeface="Arial"/>
             </a:endParaRPr>
+          </a:p>
+        </p:txBody>
+      </p:sp>
+      <p:sp>
+        <p:nvSpPr>
+          <p:cNvPr id="68" name="TextBox 67"/>
+          <p:cNvSpPr txBox="1"/>
+          <p:nvPr/>
+        </p:nvSpPr>
+        <p:spPr>
+          <a:xfrm>
+            <a:off x="630936" y="886968"/>
+            <a:ext cx="10917936" cy="283464"/>
+          </a:xfrm>
+          <a:prstGeom prst="rect">
+            <a:avLst/>
+          </a:prstGeom>
+          <a:noFill/>
+        </p:spPr>
+        <p:txBody>
+          <a:bodyPr wrap="square" lIns="0" rIns="0" tIns="0" bIns="0" anchor="t">
+            <a:spAutoFit/>
+          </a:bodyPr>
+          <a:lstStyle/>
+          <a:p>
+            <a:pPr algn="l"/>
+            <a:r>
+              <a:rPr sz="1400" b="1">
+                <a:solidFill>
+                  <a:srgbClr val="404040"/>
+                </a:solidFill>
+                <a:latin typeface="Arial"/>
+                <a:ea typeface="Arial"/>
+              </a:rPr>
+              <a:t>今期は12月末の移管の承認を目指す。移管による効果の創出は、来期に改めて検討する</a:t>
+            </a:r>
+          </a:p>
+        </p:txBody>
+      </p:sp>
+      <p:sp>
+        <p:nvSpPr>
+          <p:cNvPr id="69" name="premise"/>
+          <p:cNvSpPr/>
+          <p:nvPr/>
+        </p:nvSpPr>
+        <p:spPr>
+          <a:xfrm>
+            <a:off x="630936" y="1417320"/>
+            <a:ext cx="3017520" cy="3063240"/>
+          </a:xfrm>
+          <a:prstGeom prst="rect">
+            <a:avLst/>
+          </a:prstGeom>
+          <a:solidFill>
+            <a:srgbClr val="F2F2F2"/>
+          </a:solidFill>
+          <a:ln>
+            <a:noFill/>
+          </a:ln>
+          <a:effectLst/>
+        </p:spPr>
+        <p:style>
+          <a:lnRef idx="1">
+            <a:schemeClr val="accent1"/>
+          </a:lnRef>
+          <a:fillRef idx="3">
+            <a:schemeClr val="accent1"/>
+          </a:fillRef>
+          <a:effectRef idx="2">
+            <a:schemeClr val="accent1"/>
+          </a:effectRef>
+          <a:fontRef idx="minor">
+            <a:schemeClr val="lt1"/>
+          </a:fontRef>
+        </p:style>
+        <p:txBody>
+          <a:bodyPr rtlCol="0" anchor="ctr"/>
+          <a:lstStyle/>
+          <a:p>
+            <a:pPr algn="ctr"/>
+          </a:p>
+        </p:txBody>
+      </p:sp>
+      <p:sp>
+        <p:nvSpPr>
+          <p:cNvPr id="70" name="TextBox 69"/>
+          <p:cNvSpPr txBox="1"/>
+          <p:nvPr/>
+        </p:nvSpPr>
+        <p:spPr>
+          <a:xfrm>
+            <a:off x="822960" y="1554480"/>
+            <a:ext cx="2651760" cy="320040"/>
+          </a:xfrm>
+          <a:prstGeom prst="rect">
+            <a:avLst/>
+          </a:prstGeom>
+          <a:noFill/>
+        </p:spPr>
+        <p:txBody>
+          <a:bodyPr wrap="square" lIns="0" rIns="0" tIns="0" bIns="0" anchor="t">
+            <a:spAutoFit/>
+          </a:bodyPr>
+          <a:lstStyle/>
+          <a:p>
+            <a:pPr algn="l"/>
+            <a:r>
+              <a:rPr sz="1500" b="1">
+                <a:solidFill>
+                  <a:srgbClr val="23323B"/>
+                </a:solidFill>
+                <a:latin typeface="Arial"/>
+                <a:ea typeface="Arial"/>
+              </a:rPr>
+              <a:t>前提</a:t>
+            </a:r>
+          </a:p>
+        </p:txBody>
+      </p:sp>
+      <p:sp>
+        <p:nvSpPr>
+          <p:cNvPr id="71" name="TextBox 70"/>
+          <p:cNvSpPr txBox="1"/>
+          <p:nvPr/>
+        </p:nvSpPr>
+        <p:spPr>
+          <a:xfrm>
+            <a:off x="822960" y="1892807"/>
+            <a:ext cx="2651760" cy="228600"/>
+          </a:xfrm>
+          <a:prstGeom prst="rect">
+            <a:avLst/>
+          </a:prstGeom>
+          <a:noFill/>
+        </p:spPr>
+        <p:txBody>
+          <a:bodyPr wrap="square" lIns="0" rIns="0" tIns="0" bIns="0" anchor="t">
+            <a:spAutoFit/>
+          </a:bodyPr>
+          <a:lstStyle/>
+          <a:p>
+            <a:pPr algn="l"/>
+            <a:r>
+              <a:rPr sz="1050" b="1">
+                <a:solidFill>
+                  <a:srgbClr val="7F7F7F"/>
+                </a:solidFill>
+                <a:latin typeface="Arial"/>
+                <a:ea typeface="Arial"/>
+              </a:rPr>
+              <a:t>全社の方針として決定済み</a:t>
+            </a:r>
+          </a:p>
+        </p:txBody>
+      </p:sp>
+      <p:sp>
+        <p:nvSpPr>
+          <p:cNvPr id="72" name="TextBox 71"/>
+          <p:cNvSpPr txBox="1"/>
+          <p:nvPr/>
+        </p:nvSpPr>
+        <p:spPr>
+          <a:xfrm>
+            <a:off x="822960" y="2240280"/>
+            <a:ext cx="2651760" cy="2103120"/>
+          </a:xfrm>
+          <a:prstGeom prst="rect">
+            <a:avLst/>
+          </a:prstGeom>
+          <a:noFill/>
+        </p:spPr>
+        <p:txBody>
+          <a:bodyPr wrap="square" lIns="0" rIns="0" tIns="0" bIns="0" anchor="t">
+            <a:spAutoFit/>
+          </a:bodyPr>
+          <a:lstStyle/>
+          <a:p>
+            <a:pPr algn="l" marL="171450" indent="-171450">
+              <a:spcAft>
+                <a:spcPts val="600"/>
+              </a:spcAft>
+              <a:buChar char="•"/>
+            </a:pPr>
+            <a:r>
+              <a:rPr sz="1100" b="0">
+                <a:solidFill>
+                  <a:srgbClr val="23323B"/>
+                </a:solidFill>
+                <a:latin typeface="Arial"/>
+                <a:ea typeface="Arial"/>
+              </a:rPr>
+              <a:t>経営で決定済み。全社向けの予算策定ガイドラインに明記されている</a:t>
+            </a:r>
+          </a:p>
+          <a:p>
+            <a:pPr algn="l" marL="171450" indent="-171450">
+              <a:spcAft>
+                <a:spcPts val="600"/>
+              </a:spcAft>
+              <a:buChar char="•"/>
+            </a:pPr>
+            <a:r>
+              <a:rPr sz="1100" b="0">
+                <a:solidFill>
+                  <a:srgbClr val="23323B"/>
+                </a:solidFill>
+                <a:latin typeface="Arial"/>
+                <a:ea typeface="Arial"/>
+              </a:rPr>
+              <a:t>対象は営業部門以外の部門（人事・総務・財務を含む）。各部門には案内済み</a:t>
+            </a:r>
+          </a:p>
+          <a:p>
+            <a:pPr algn="l" marL="171450" indent="-171450">
+              <a:spcAft>
+                <a:spcPts val="600"/>
+              </a:spcAft>
+              <a:buChar char="•"/>
+            </a:pPr>
+            <a:r>
+              <a:rPr sz="1100" b="0">
+                <a:solidFill>
+                  <a:srgbClr val="23323B"/>
+                </a:solidFill>
+                <a:latin typeface="Arial"/>
+                <a:ea typeface="Arial"/>
+              </a:rPr>
+              <a:t>範囲は、業務アプリケーションとその関連ツールの予算・契約・間接業務</a:t>
+            </a:r>
+          </a:p>
+        </p:txBody>
+      </p:sp>
+      <p:sp>
+        <p:nvSpPr>
+          <p:cNvPr id="73" name="policy"/>
+          <p:cNvSpPr/>
+          <p:nvPr/>
+        </p:nvSpPr>
+        <p:spPr>
+          <a:xfrm>
+            <a:off x="3831336" y="1417320"/>
+            <a:ext cx="7717536" cy="3063240"/>
+          </a:xfrm>
+          <a:prstGeom prst="rect">
+            <a:avLst/>
+          </a:prstGeom>
+          <a:solidFill>
+            <a:srgbClr val="F2F2F2"/>
+          </a:solidFill>
+          <a:ln>
+            <a:noFill/>
+          </a:ln>
+          <a:effectLst/>
+        </p:spPr>
+        <p:style>
+          <a:lnRef idx="1">
+            <a:schemeClr val="accent1"/>
+          </a:lnRef>
+          <a:fillRef idx="3">
+            <a:schemeClr val="accent1"/>
+          </a:fillRef>
+          <a:effectRef idx="2">
+            <a:schemeClr val="accent1"/>
+          </a:effectRef>
+          <a:fontRef idx="minor">
+            <a:schemeClr val="lt1"/>
+          </a:fontRef>
+        </p:style>
+        <p:txBody>
+          <a:bodyPr rtlCol="0" anchor="ctr"/>
+          <a:lstStyle/>
+          <a:p>
+            <a:pPr algn="ctr"/>
+          </a:p>
+        </p:txBody>
+      </p:sp>
+      <p:sp>
+        <p:nvSpPr>
+          <p:cNvPr id="74" name="TextBox 73"/>
+          <p:cNvSpPr txBox="1"/>
+          <p:nvPr/>
+        </p:nvSpPr>
+        <p:spPr>
+          <a:xfrm>
+            <a:off x="4023360" y="1554480"/>
+            <a:ext cx="1828800" cy="320040"/>
+          </a:xfrm>
+          <a:prstGeom prst="rect">
+            <a:avLst/>
+          </a:prstGeom>
+          <a:noFill/>
+        </p:spPr>
+        <p:txBody>
+          <a:bodyPr wrap="square" lIns="0" rIns="0" tIns="0" bIns="0" anchor="t">
+            <a:spAutoFit/>
+          </a:bodyPr>
+          <a:lstStyle/>
+          <a:p>
+            <a:pPr algn="l"/>
+            <a:r>
+              <a:rPr sz="1500" b="1">
+                <a:solidFill>
+                  <a:srgbClr val="23323B"/>
+                </a:solidFill>
+                <a:latin typeface="Arial"/>
+                <a:ea typeface="Arial"/>
+              </a:rPr>
+              <a:t>方針</a:t>
+            </a:r>
+          </a:p>
+        </p:txBody>
+      </p:sp>
+      <p:sp>
+        <p:nvSpPr>
+          <p:cNvPr id="75" name="TextBox 74"/>
+          <p:cNvSpPr txBox="1"/>
+          <p:nvPr/>
+        </p:nvSpPr>
+        <p:spPr>
+          <a:xfrm>
+            <a:off x="4023360" y="1892807"/>
+            <a:ext cx="5486400" cy="228600"/>
+          </a:xfrm>
+          <a:prstGeom prst="rect">
+            <a:avLst/>
+          </a:prstGeom>
+          <a:noFill/>
+        </p:spPr>
+        <p:txBody>
+          <a:bodyPr wrap="square" lIns="0" rIns="0" tIns="0" bIns="0" anchor="t">
+            <a:spAutoFit/>
+          </a:bodyPr>
+          <a:lstStyle/>
+          <a:p>
+            <a:pPr algn="l"/>
+            <a:r>
+              <a:rPr sz="1050" b="1">
+                <a:solidFill>
+                  <a:srgbClr val="7F7F7F"/>
+                </a:solidFill>
+                <a:latin typeface="Arial"/>
+                <a:ea typeface="Arial"/>
+              </a:rPr>
+              <a:t>移す時期によって、予算を3つに分ける</a:t>
+            </a:r>
+          </a:p>
+        </p:txBody>
+      </p:sp>
+      <p:sp>
+        <p:nvSpPr>
+          <p:cNvPr id="76" name="policy-1"/>
+          <p:cNvSpPr/>
+          <p:nvPr/>
+        </p:nvSpPr>
+        <p:spPr>
+          <a:xfrm>
+            <a:off x="4023360" y="2240280"/>
+            <a:ext cx="2322575" cy="1325880"/>
+          </a:xfrm>
+          <a:prstGeom prst="rect">
+            <a:avLst/>
+          </a:prstGeom>
+          <a:solidFill>
+            <a:srgbClr val="FFFFFF"/>
+          </a:solidFill>
+          <a:ln w="9525">
+            <a:solidFill>
+              <a:srgbClr val="BFBFBF"/>
+            </a:solidFill>
+          </a:ln>
+          <a:effectLst/>
+        </p:spPr>
+        <p:style>
+          <a:lnRef idx="1">
+            <a:schemeClr val="accent1"/>
+          </a:lnRef>
+          <a:fillRef idx="3">
+            <a:schemeClr val="accent1"/>
+          </a:fillRef>
+          <a:effectRef idx="2">
+            <a:schemeClr val="accent1"/>
+          </a:effectRef>
+          <a:fontRef idx="minor">
+            <a:schemeClr val="lt1"/>
+          </a:fontRef>
+        </p:style>
+        <p:txBody>
+          <a:bodyPr rtlCol="0" anchor="ctr"/>
+          <a:lstStyle/>
+          <a:p>
+            <a:pPr algn="ctr"/>
+          </a:p>
+        </p:txBody>
+      </p:sp>
+      <p:sp>
+        <p:nvSpPr>
+          <p:cNvPr id="77" name="TextBox 76"/>
+          <p:cNvSpPr txBox="1"/>
+          <p:nvPr/>
+        </p:nvSpPr>
+        <p:spPr>
+          <a:xfrm>
+            <a:off x="4151376" y="2331720"/>
+            <a:ext cx="2066543" cy="274320"/>
+          </a:xfrm>
+          <a:prstGeom prst="rect">
+            <a:avLst/>
+          </a:prstGeom>
+          <a:noFill/>
+        </p:spPr>
+        <p:txBody>
+          <a:bodyPr wrap="square" lIns="0" rIns="0" tIns="0" bIns="0" anchor="t">
+            <a:spAutoFit/>
+          </a:bodyPr>
+          <a:lstStyle/>
+          <a:p>
+            <a:pPr algn="l"/>
+            <a:r>
+              <a:rPr sz="1100" b="1">
+                <a:solidFill>
+                  <a:srgbClr val="23323B"/>
+                </a:solidFill>
+                <a:latin typeface="Arial"/>
+                <a:ea typeface="Arial"/>
+              </a:rPr>
+              <a:t>2027年1月1日にそろって移す</a:t>
+            </a:r>
+          </a:p>
+        </p:txBody>
+      </p:sp>
+      <p:sp>
+        <p:nvSpPr>
+          <p:cNvPr id="78" name="TextBox 77"/>
+          <p:cNvSpPr txBox="1"/>
+          <p:nvPr/>
+        </p:nvSpPr>
+        <p:spPr>
+          <a:xfrm>
+            <a:off x="4151376" y="2651760"/>
+            <a:ext cx="2066543" cy="868680"/>
+          </a:xfrm>
+          <a:prstGeom prst="rect">
+            <a:avLst/>
+          </a:prstGeom>
+          <a:noFill/>
+        </p:spPr>
+        <p:txBody>
+          <a:bodyPr wrap="square" lIns="0" rIns="0" tIns="0" bIns="0" anchor="t">
+            <a:spAutoFit/>
+          </a:bodyPr>
+          <a:lstStyle/>
+          <a:p>
+            <a:pPr algn="l"/>
+            <a:r>
+              <a:rPr sz="1000" b="0">
+                <a:solidFill>
+                  <a:srgbClr val="404040"/>
+                </a:solidFill>
+                <a:latin typeface="Arial"/>
+                <a:ea typeface="Arial"/>
+              </a:rPr>
+              <a:t>経費予算（保守・ライセンス・クラウド利用料・業務委託などの運用費用）</a:t>
+            </a:r>
+          </a:p>
+        </p:txBody>
+      </p:sp>
+      <p:cxnSp>
+        <p:nvCxnSpPr>
+          <p:cNvPr id="79" name="Connector 78"/>
+          <p:cNvCxnSpPr/>
+          <p:nvPr/>
+        </p:nvCxnSpPr>
+        <p:spPr>
+          <a:xfrm>
+            <a:off x="5184648" y="3566160"/>
+            <a:ext cx="0" cy="320040"/>
+          </a:xfrm>
+          <a:prstGeom prst="line">
+            <a:avLst/>
+          </a:prstGeom>
+          <a:ln w="19050">
+            <a:solidFill>
+              <a:srgbClr val="7F7F7F"/>
+            </a:solidFill>
+            <a:tailEnd type="triangle" w="med" len="med"/>
+          </a:ln>
+        </p:spPr>
+        <p:style>
+          <a:lnRef idx="2">
+            <a:schemeClr val="accent1"/>
+          </a:lnRef>
+          <a:fillRef idx="0">
+            <a:schemeClr val="accent1"/>
+          </a:fillRef>
+          <a:effectRef idx="1">
+            <a:schemeClr val="accent1"/>
+          </a:effectRef>
+          <a:fontRef idx="minor">
+            <a:schemeClr val="tx1"/>
+          </a:fontRef>
+        </p:style>
+      </p:cxnSp>
+      <p:sp>
+        <p:nvSpPr>
+          <p:cNvPr id="80" name="policy-2"/>
+          <p:cNvSpPr/>
+          <p:nvPr/>
+        </p:nvSpPr>
+        <p:spPr>
+          <a:xfrm>
+            <a:off x="6528816" y="2240280"/>
+            <a:ext cx="2322575" cy="1325880"/>
+          </a:xfrm>
+          <a:prstGeom prst="rect">
+            <a:avLst/>
+          </a:prstGeom>
+          <a:solidFill>
+            <a:srgbClr val="FFFFFF"/>
+          </a:solidFill>
+          <a:ln w="9525">
+            <a:solidFill>
+              <a:srgbClr val="BFBFBF"/>
+            </a:solidFill>
+          </a:ln>
+          <a:effectLst/>
+        </p:spPr>
+        <p:style>
+          <a:lnRef idx="1">
+            <a:schemeClr val="accent1"/>
+          </a:lnRef>
+          <a:fillRef idx="3">
+            <a:schemeClr val="accent1"/>
+          </a:fillRef>
+          <a:effectRef idx="2">
+            <a:schemeClr val="accent1"/>
+          </a:effectRef>
+          <a:fontRef idx="minor">
+            <a:schemeClr val="lt1"/>
+          </a:fontRef>
+        </p:style>
+        <p:txBody>
+          <a:bodyPr rtlCol="0" anchor="ctr"/>
+          <a:lstStyle/>
+          <a:p>
+            <a:pPr algn="ctr"/>
+          </a:p>
+        </p:txBody>
+      </p:sp>
+      <p:sp>
+        <p:nvSpPr>
+          <p:cNvPr id="81" name="TextBox 80"/>
+          <p:cNvSpPr txBox="1"/>
+          <p:nvPr/>
+        </p:nvSpPr>
+        <p:spPr>
+          <a:xfrm>
+            <a:off x="6656832" y="2331720"/>
+            <a:ext cx="2066543" cy="274320"/>
+          </a:xfrm>
+          <a:prstGeom prst="rect">
+            <a:avLst/>
+          </a:prstGeom>
+          <a:noFill/>
+        </p:spPr>
+        <p:txBody>
+          <a:bodyPr wrap="square" lIns="0" rIns="0" tIns="0" bIns="0" anchor="t">
+            <a:spAutoFit/>
+          </a:bodyPr>
+          <a:lstStyle/>
+          <a:p>
+            <a:pPr algn="l"/>
+            <a:r>
+              <a:rPr sz="1100" b="1">
+                <a:solidFill>
+                  <a:srgbClr val="23323B"/>
+                </a:solidFill>
+                <a:latin typeface="Arial"/>
+                <a:ea typeface="Arial"/>
+              </a:rPr>
+              <a:t>来年度予算から GDSが持つ</a:t>
+            </a:r>
+          </a:p>
+        </p:txBody>
+      </p:sp>
+      <p:sp>
+        <p:nvSpPr>
+          <p:cNvPr id="82" name="TextBox 81"/>
+          <p:cNvSpPr txBox="1"/>
+          <p:nvPr/>
+        </p:nvSpPr>
+        <p:spPr>
+          <a:xfrm>
+            <a:off x="6656832" y="2651760"/>
+            <a:ext cx="2066543" cy="868680"/>
+          </a:xfrm>
+          <a:prstGeom prst="rect">
+            <a:avLst/>
+          </a:prstGeom>
+          <a:noFill/>
+        </p:spPr>
+        <p:txBody>
+          <a:bodyPr wrap="square" lIns="0" rIns="0" tIns="0" bIns="0" anchor="t">
+            <a:spAutoFit/>
+          </a:bodyPr>
+          <a:lstStyle/>
+          <a:p>
+            <a:pPr algn="l"/>
+            <a:r>
+              <a:rPr sz="1000" b="0">
+                <a:solidFill>
+                  <a:srgbClr val="404040"/>
+                </a:solidFill>
+                <a:latin typeface="Arial"/>
+                <a:ea typeface="Arial"/>
+              </a:rPr>
+              <a:t>来年度に始める IT投資案件の予算</a:t>
+            </a:r>
+          </a:p>
+        </p:txBody>
+      </p:sp>
+      <p:cxnSp>
+        <p:nvCxnSpPr>
+          <p:cNvPr id="83" name="Connector 82"/>
+          <p:cNvCxnSpPr/>
+          <p:nvPr/>
+        </p:nvCxnSpPr>
+        <p:spPr>
+          <a:xfrm>
+            <a:off x="7690104" y="3566160"/>
+            <a:ext cx="0" cy="320040"/>
+          </a:xfrm>
+          <a:prstGeom prst="line">
+            <a:avLst/>
+          </a:prstGeom>
+          <a:ln w="19050">
+            <a:solidFill>
+              <a:srgbClr val="7F7F7F"/>
+            </a:solidFill>
+            <a:tailEnd type="triangle" w="med" len="med"/>
+          </a:ln>
+        </p:spPr>
+        <p:style>
+          <a:lnRef idx="2">
+            <a:schemeClr val="accent1"/>
+          </a:lnRef>
+          <a:fillRef idx="0">
+            <a:schemeClr val="accent1"/>
+          </a:fillRef>
+          <a:effectRef idx="1">
+            <a:schemeClr val="accent1"/>
+          </a:effectRef>
+          <a:fontRef idx="minor">
+            <a:schemeClr val="tx1"/>
+          </a:fontRef>
+        </p:style>
+      </p:cxnSp>
+      <p:sp>
+        <p:nvSpPr>
+          <p:cNvPr id="84" name="policy-3"/>
+          <p:cNvSpPr/>
+          <p:nvPr/>
+        </p:nvSpPr>
+        <p:spPr>
+          <a:xfrm>
+            <a:off x="9034272" y="2240280"/>
+            <a:ext cx="2322575" cy="1325880"/>
+          </a:xfrm>
+          <a:prstGeom prst="rect">
+            <a:avLst/>
+          </a:prstGeom>
+          <a:solidFill>
+            <a:srgbClr val="FFFFFF"/>
+          </a:solidFill>
+          <a:ln w="9525">
+            <a:solidFill>
+              <a:srgbClr val="BFBFBF"/>
+            </a:solidFill>
+          </a:ln>
+          <a:effectLst/>
+        </p:spPr>
+        <p:style>
+          <a:lnRef idx="1">
+            <a:schemeClr val="accent1"/>
+          </a:lnRef>
+          <a:fillRef idx="3">
+            <a:schemeClr val="accent1"/>
+          </a:fillRef>
+          <a:effectRef idx="2">
+            <a:schemeClr val="accent1"/>
+          </a:effectRef>
+          <a:fontRef idx="minor">
+            <a:schemeClr val="lt1"/>
+          </a:fontRef>
+        </p:style>
+        <p:txBody>
+          <a:bodyPr rtlCol="0" anchor="ctr"/>
+          <a:lstStyle/>
+          <a:p>
+            <a:pPr algn="ctr"/>
+          </a:p>
+        </p:txBody>
+      </p:sp>
+      <p:sp>
+        <p:nvSpPr>
+          <p:cNvPr id="85" name="TextBox 84"/>
+          <p:cNvSpPr txBox="1"/>
+          <p:nvPr/>
+        </p:nvSpPr>
+        <p:spPr>
+          <a:xfrm>
+            <a:off x="9162288" y="2331720"/>
+            <a:ext cx="2066543" cy="274320"/>
+          </a:xfrm>
+          <a:prstGeom prst="rect">
+            <a:avLst/>
+          </a:prstGeom>
+          <a:noFill/>
+        </p:spPr>
+        <p:txBody>
+          <a:bodyPr wrap="square" lIns="0" rIns="0" tIns="0" bIns="0" anchor="t">
+            <a:spAutoFit/>
+          </a:bodyPr>
+          <a:lstStyle/>
+          <a:p>
+            <a:pPr algn="l"/>
+            <a:r>
+              <a:rPr sz="1100" b="1">
+                <a:solidFill>
+                  <a:srgbClr val="23323B"/>
+                </a:solidFill>
+                <a:latin typeface="Arial"/>
+                <a:ea typeface="Arial"/>
+              </a:rPr>
+              <a:t>移す時期を案件ごとに合意する</a:t>
+            </a:r>
+          </a:p>
+        </p:txBody>
+      </p:sp>
+      <p:sp>
+        <p:nvSpPr>
+          <p:cNvPr id="86" name="TextBox 85"/>
+          <p:cNvSpPr txBox="1"/>
+          <p:nvPr/>
+        </p:nvSpPr>
+        <p:spPr>
+          <a:xfrm>
+            <a:off x="9162288" y="2651760"/>
+            <a:ext cx="2066543" cy="868680"/>
+          </a:xfrm>
+          <a:prstGeom prst="rect">
+            <a:avLst/>
+          </a:prstGeom>
+          <a:noFill/>
+        </p:spPr>
+        <p:txBody>
+          <a:bodyPr wrap="square" lIns="0" rIns="0" tIns="0" bIns="0" anchor="t">
+            <a:spAutoFit/>
+          </a:bodyPr>
+          <a:lstStyle/>
+          <a:p>
+            <a:pPr algn="l"/>
+            <a:r>
+              <a:rPr sz="1000" b="0">
+                <a:solidFill>
+                  <a:srgbClr val="404040"/>
+                </a:solidFill>
+                <a:latin typeface="Arial"/>
+                <a:ea typeface="Arial"/>
+              </a:rPr>
+              <a:t>今年度から続く IT投資案件（取得済みの資産、建設仮勘定、着手済み）。財務経理と確認する（7枚目）</a:t>
+            </a:r>
+          </a:p>
+        </p:txBody>
+      </p:sp>
+      <p:cxnSp>
+        <p:nvCxnSpPr>
+          <p:cNvPr id="87" name="Connector 86"/>
+          <p:cNvCxnSpPr/>
+          <p:nvPr/>
+        </p:nvCxnSpPr>
+        <p:spPr>
+          <a:xfrm>
+            <a:off x="10195559" y="3566160"/>
+            <a:ext cx="0" cy="320040"/>
+          </a:xfrm>
+          <a:prstGeom prst="line">
+            <a:avLst/>
+          </a:prstGeom>
+          <a:ln w="19050">
+            <a:solidFill>
+              <a:srgbClr val="7F7F7F"/>
+            </a:solidFill>
+            <a:tailEnd type="triangle" w="med" len="med"/>
+          </a:ln>
+        </p:spPr>
+        <p:style>
+          <a:lnRef idx="2">
+            <a:schemeClr val="accent1"/>
+          </a:lnRef>
+          <a:fillRef idx="0">
+            <a:schemeClr val="accent1"/>
+          </a:fillRef>
+          <a:effectRef idx="1">
+            <a:schemeClr val="accent1"/>
+          </a:effectRef>
+          <a:fontRef idx="minor">
+            <a:schemeClr val="tx1"/>
+          </a:fontRef>
+        </p:style>
+      </p:cxnSp>
+      <p:sp>
+        <p:nvSpPr>
+          <p:cNvPr id="88" name="policy-gds"/>
+          <p:cNvSpPr/>
+          <p:nvPr/>
+        </p:nvSpPr>
+        <p:spPr>
+          <a:xfrm>
+            <a:off x="4023360" y="3886200"/>
+            <a:ext cx="7333488" cy="384048"/>
+          </a:xfrm>
+          <a:prstGeom prst="rect">
+            <a:avLst/>
+          </a:prstGeom>
+          <a:solidFill>
+            <a:srgbClr val="23323B"/>
+          </a:solidFill>
+          <a:ln>
+            <a:noFill/>
+          </a:ln>
+          <a:effectLst/>
+        </p:spPr>
+        <p:style>
+          <a:lnRef idx="1">
+            <a:schemeClr val="accent1"/>
+          </a:lnRef>
+          <a:fillRef idx="3">
+            <a:schemeClr val="accent1"/>
+          </a:fillRef>
+          <a:effectRef idx="2">
+            <a:schemeClr val="accent1"/>
+          </a:effectRef>
+          <a:fontRef idx="minor">
+            <a:schemeClr val="lt1"/>
+          </a:fontRef>
+        </p:style>
+        <p:txBody>
+          <a:bodyPr rtlCol="0" anchor="ctr"/>
+          <a:lstStyle/>
+          <a:p>
+            <a:pPr algn="ctr"/>
+          </a:p>
+        </p:txBody>
+      </p:sp>
+      <p:sp>
+        <p:nvSpPr>
+          <p:cNvPr id="89" name="TextBox 88"/>
+          <p:cNvSpPr txBox="1"/>
+          <p:nvPr/>
+        </p:nvSpPr>
+        <p:spPr>
+          <a:xfrm>
+            <a:off x="4023360" y="3886200"/>
+            <a:ext cx="7333488" cy="384048"/>
+          </a:xfrm>
+          <a:prstGeom prst="rect">
+            <a:avLst/>
+          </a:prstGeom>
+          <a:noFill/>
+        </p:spPr>
+        <p:txBody>
+          <a:bodyPr wrap="square" lIns="0" rIns="0" tIns="0" bIns="0" anchor="ctr">
+            <a:spAutoFit/>
+          </a:bodyPr>
+          <a:lstStyle/>
+          <a:p>
+            <a:pPr algn="ctr"/>
+            <a:r>
+              <a:rPr sz="1300" b="1">
+                <a:solidFill>
+                  <a:srgbClr val="FFFFFF"/>
+                </a:solidFill>
+                <a:latin typeface="Arial"/>
+                <a:ea typeface="Arial"/>
+              </a:rPr>
+              <a:t>GDS</a:t>
+            </a:r>
+          </a:p>
+        </p:txBody>
+      </p:sp>
+      <p:sp>
+        <p:nvSpPr>
+          <p:cNvPr id="90" name="post-transfer"/>
+          <p:cNvSpPr/>
+          <p:nvPr/>
+        </p:nvSpPr>
+        <p:spPr>
+          <a:xfrm>
+            <a:off x="630936" y="4617720"/>
+            <a:ext cx="10917936" cy="822960"/>
+          </a:xfrm>
+          <a:prstGeom prst="rect">
+            <a:avLst/>
+          </a:prstGeom>
+          <a:solidFill>
+            <a:srgbClr val="F2F2F2"/>
+          </a:solidFill>
+          <a:ln>
+            <a:noFill/>
+          </a:ln>
+          <a:effectLst/>
+        </p:spPr>
+        <p:style>
+          <a:lnRef idx="1">
+            <a:schemeClr val="accent1"/>
+          </a:lnRef>
+          <a:fillRef idx="3">
+            <a:schemeClr val="accent1"/>
+          </a:fillRef>
+          <a:effectRef idx="2">
+            <a:schemeClr val="accent1"/>
+          </a:effectRef>
+          <a:fontRef idx="minor">
+            <a:schemeClr val="lt1"/>
+          </a:fontRef>
+        </p:style>
+        <p:txBody>
+          <a:bodyPr rtlCol="0" anchor="ctr"/>
+          <a:lstStyle/>
+          <a:p>
+            <a:pPr algn="ctr"/>
+          </a:p>
+        </p:txBody>
+      </p:sp>
+      <p:sp>
+        <p:nvSpPr>
+          <p:cNvPr id="91" name="TextBox 90"/>
+          <p:cNvSpPr txBox="1"/>
+          <p:nvPr/>
+        </p:nvSpPr>
+        <p:spPr>
+          <a:xfrm>
+            <a:off x="822960" y="4709160"/>
+            <a:ext cx="2377440" cy="640080"/>
+          </a:xfrm>
+          <a:prstGeom prst="rect">
+            <a:avLst/>
+          </a:prstGeom>
+          <a:noFill/>
+        </p:spPr>
+        <p:txBody>
+          <a:bodyPr wrap="square" lIns="0" rIns="0" tIns="0" bIns="0" anchor="ctr">
+            <a:spAutoFit/>
+          </a:bodyPr>
+          <a:lstStyle/>
+          <a:p>
+            <a:pPr algn="l"/>
+            <a:r>
+              <a:rPr sz="1200" b="1">
+                <a:solidFill>
+                  <a:srgbClr val="23323B"/>
+                </a:solidFill>
+                <a:latin typeface="Arial"/>
+                <a:ea typeface="Arial"/>
+              </a:rPr>
+              <a:t>移管後に</a:t>
+            </a:r>
+          </a:p>
+          <a:p>
+            <a:pPr algn="l"/>
+            <a:r>
+              <a:rPr sz="1200" b="1">
+                <a:solidFill>
+                  <a:srgbClr val="23323B"/>
+                </a:solidFill>
+                <a:latin typeface="Arial"/>
+                <a:ea typeface="Arial"/>
+              </a:rPr>
+              <a:t>順次対応すること</a:t>
+            </a:r>
+          </a:p>
+        </p:txBody>
+      </p:sp>
+      <p:sp>
+        <p:nvSpPr>
+          <p:cNvPr id="92" name="TextBox 91"/>
+          <p:cNvSpPr txBox="1"/>
+          <p:nvPr/>
+        </p:nvSpPr>
+        <p:spPr>
+          <a:xfrm>
+            <a:off x="3200400" y="4709160"/>
+            <a:ext cx="4023360" cy="658368"/>
+          </a:xfrm>
+          <a:prstGeom prst="rect">
+            <a:avLst/>
+          </a:prstGeom>
+          <a:noFill/>
+        </p:spPr>
+        <p:txBody>
+          <a:bodyPr wrap="square" lIns="0" rIns="0" tIns="0" bIns="0" anchor="ctr">
+            <a:spAutoFit/>
+          </a:bodyPr>
+          <a:lstStyle/>
+          <a:p>
+            <a:pPr algn="l"/>
+            <a:r>
+              <a:rPr sz="1000" b="1">
+                <a:solidFill>
+                  <a:srgbClr val="23323B"/>
+                </a:solidFill>
+                <a:latin typeface="Arial"/>
+                <a:ea typeface="Arial"/>
+              </a:rPr>
+              <a:t>経過措置：</a:t>
+            </a:r>
+            <a:r>
+              <a:rPr sz="1000" b="0">
+                <a:solidFill>
+                  <a:srgbClr val="23323B"/>
+                </a:solidFill>
+                <a:latin typeface="Arial"/>
+                <a:ea typeface="Arial"/>
+              </a:rPr>
+              <a:t>担当の変更に正式な手続き（SOP の改訂、GxP の変更管理など）が要る業務は、手続きが終わるまで今の担当が続ける。業務と完了予定は合意文書に残す</a:t>
+            </a:r>
+          </a:p>
+        </p:txBody>
+      </p:sp>
+      <p:sp>
+        <p:nvSpPr>
+          <p:cNvPr id="93" name="TextBox 92"/>
+          <p:cNvSpPr txBox="1"/>
+          <p:nvPr/>
+        </p:nvSpPr>
+        <p:spPr>
+          <a:xfrm>
+            <a:off x="7498079" y="4709160"/>
+            <a:ext cx="3886200" cy="658368"/>
+          </a:xfrm>
+          <a:prstGeom prst="rect">
+            <a:avLst/>
+          </a:prstGeom>
+          <a:noFill/>
+        </p:spPr>
+        <p:txBody>
+          <a:bodyPr wrap="square" lIns="0" rIns="0" tIns="0" bIns="0" anchor="ctr">
+            <a:spAutoFit/>
+          </a:bodyPr>
+          <a:lstStyle/>
+          <a:p>
+            <a:pPr algn="l"/>
+            <a:r>
+              <a:rPr sz="1000" b="1">
+                <a:solidFill>
+                  <a:srgbClr val="23323B"/>
+                </a:solidFill>
+                <a:latin typeface="Arial"/>
+                <a:ea typeface="Arial"/>
+              </a:rPr>
+              <a:t>契約：</a:t>
+            </a:r>
+            <a:r>
+              <a:rPr sz="1000" b="0">
+                <a:solidFill>
+                  <a:srgbClr val="23323B"/>
+                </a:solidFill>
+                <a:latin typeface="Arial"/>
+                <a:ea typeface="Arial"/>
+              </a:rPr>
+              <a:t>署名者は次回の更新から GDSに変わる。請求書の宛名の変更は2月初旬までに相手先に連絡する</a:t>
+            </a:r>
+          </a:p>
+        </p:txBody>
+      </p:sp>
+      <p:sp>
+        <p:nvSpPr>
+          <p:cNvPr id="94" name="goal-band"/>
+          <p:cNvSpPr/>
+          <p:nvPr/>
+        </p:nvSpPr>
+        <p:spPr>
+          <a:xfrm>
+            <a:off x="630936" y="5596128"/>
+            <a:ext cx="10917936" cy="530352"/>
+          </a:xfrm>
+          <a:prstGeom prst="rect">
+            <a:avLst/>
+          </a:prstGeom>
+          <a:solidFill>
+            <a:srgbClr val="23323B"/>
+          </a:solidFill>
+          <a:ln>
+            <a:noFill/>
+          </a:ln>
+          <a:effectLst/>
+        </p:spPr>
+        <p:style>
+          <a:lnRef idx="1">
+            <a:schemeClr val="accent1"/>
+          </a:lnRef>
+          <a:fillRef idx="3">
+            <a:schemeClr val="accent1"/>
+          </a:fillRef>
+          <a:effectRef idx="2">
+            <a:schemeClr val="accent1"/>
+          </a:effectRef>
+          <a:fontRef idx="minor">
+            <a:schemeClr val="lt1"/>
+          </a:fontRef>
+        </p:style>
+        <p:txBody>
+          <a:bodyPr rtlCol="0" anchor="ctr"/>
+          <a:lstStyle/>
+          <a:p>
+            <a:pPr algn="ctr"/>
+          </a:p>
+        </p:txBody>
+      </p:sp>
+      <p:sp>
+        <p:nvSpPr>
+          <p:cNvPr id="95" name="TextBox 94"/>
+          <p:cNvSpPr txBox="1"/>
+          <p:nvPr/>
+        </p:nvSpPr>
+        <p:spPr>
+          <a:xfrm>
+            <a:off x="868680" y="5596128"/>
+            <a:ext cx="10515600" cy="530352"/>
+          </a:xfrm>
+          <a:prstGeom prst="rect">
+            <a:avLst/>
+          </a:prstGeom>
+          <a:noFill/>
+        </p:spPr>
+        <p:txBody>
+          <a:bodyPr wrap="square" lIns="0" rIns="0" tIns="0" bIns="0" anchor="ctr">
+            <a:spAutoFit/>
+          </a:bodyPr>
+          <a:lstStyle/>
+          <a:p>
+            <a:pPr algn="l"/>
+            <a:r>
+              <a:rPr sz="1700" b="1">
+                <a:solidFill>
+                  <a:srgbClr val="FFFFFF"/>
+                </a:solidFill>
+                <a:latin typeface="Arial"/>
+                <a:ea typeface="Arial"/>
+              </a:rPr>
+              <a:t>目標：12月末に、移管の稟議が承認されている</a:t>
+            </a:r>
           </a:p>
         </p:txBody>
       </p:sp>
@@ -8911,7 +9544,7 @@
             <a:r>
               <a:rPr b="1" i="0" lang="en-US" sz="850" u="none" cap="none" strike="noStrike">
                 <a:solidFill>
-                  <a:srgbClr val="23323B"/>
+                  <a:srgbClr val="B42318"/>
                 </a:solidFill>
                 <a:latin typeface="Arial"/>
                 <a:ea typeface="Arial"/>
@@ -8948,7 +9581,7 @@
             <a:r>
               <a:rPr b="1" i="0" lang="en-US" sz="850" u="none" cap="none" strike="noStrike">
                 <a:solidFill>
-                  <a:srgbClr val="23323B"/>
+                  <a:srgbClr val="B42318"/>
                 </a:solidFill>
                 <a:latin typeface="Arial"/>
                 <a:ea typeface="Arial"/>
@@ -10806,9 +11439,9 @@
             <a:avLst/>
           </a:prstGeom>
           <a:noFill/>
-          <a:ln cap="flat" cmpd="sng" w="9525">
+          <a:ln cap="flat" cmpd="sng" w="25400">
             <a:solidFill>
-              <a:srgbClr val="5D6164"/>
+              <a:srgbClr val="B42318"/>
             </a:solidFill>
             <a:prstDash val="solid"/>
             <a:round/>
@@ -10868,7 +11501,7 @@
         </p:nvSpPr>
         <p:spPr>
           <a:xfrm>
-            <a:off x="794402" y="5458968"/>
+            <a:off x="794402" y="5440680"/>
             <a:ext cx="5061018" cy="265663"/>
           </a:xfrm>
           <a:prstGeom prst="rect">
@@ -10909,7 +11542,7 @@
                 <a:cs typeface="Arial"/>
                 <a:sym typeface="Arial"/>
               </a:rPr>
-              <a:t>S&amp;Gの完了状態：移管の稟議が承認されている</a:t>
+              <a:t>S&amp;G：移管の稟議が承認されている</a:t>
             </a:r>
             <a:endParaRPr b="0" i="0" sz="1200" u="none" cap="none" strike="noStrike">
               <a:solidFill>
@@ -10931,8 +11564,8 @@
         </p:nvSpPr>
         <p:spPr>
           <a:xfrm>
-            <a:off x="794402" y="5742432"/>
-            <a:ext cx="5061018" cy="603504"/>
+            <a:off x="794402" y="5705856"/>
+            <a:ext cx="5061018" cy="658368"/>
           </a:xfrm>
           <a:prstGeom prst="rect">
             <a:avLst/>
@@ -10948,7 +11581,7 @@
           </a:bodyPr>
           <a:lstStyle/>
           <a:p>
-            <a:pPr indent="0" lvl="0" marL="0" marR="0" rtl="0" algn="l">
+            <a:pPr indent="-228600" lvl="0" marL="228600" marR="0" rtl="0" algn="l">
               <a:spcBef>
                 <a:spcPts val="0"/>
               </a:spcBef>
@@ -10956,14 +11589,13 @@
                 <a:spcPts val="0"/>
               </a:spcAft>
               <a:buClr>
-                <a:srgbClr val="000000"/>
+                <a:srgbClr val="ED5604"/>
               </a:buClr>
-              <a:buSzPts val="1000"/>
               <a:buFont typeface="Arial"/>
-              <a:buNone/>
+              <a:buChar char="✓"/>
             </a:pPr>
             <a:r>
-              <a:rPr b="0" i="0" lang="en-US" sz="1000" u="none" cap="none" strike="noStrike">
+              <a:rPr b="0" i="0" lang="en-US" sz="1050" u="none" cap="none" strike="noStrike">
                 <a:solidFill>
                   <a:srgbClr val="000000"/>
                 </a:solidFill>
@@ -10972,7 +11604,7 @@
                 <a:cs typeface="Arial"/>
                 <a:sym typeface="Arial"/>
               </a:rPr>
-              <a:t>そのための材料：全案件の合意文書と完了報告、進捗管理表（移管ステータス）がそろい、稟議に必要な情報（移管する予算と契約、来年度予算）が整理されている</a:t>
+              <a:t>全案件の合意文書と完了報告がそろっている</a:t>
             </a:r>
             <a:endParaRPr b="0" i="0" sz="1000" u="none" cap="none" strike="noStrike">
               <a:solidFill>
@@ -10984,6 +11616,78 @@
               <a:sym typeface="Arial"/>
             </a:endParaRPr>
           </a:p>
+          <a:p>
+            <a:pPr indent="-228600" lvl="0" marL="228600" marR="0" rtl="0" algn="l">
+              <a:spcBef>
+                <a:spcPts val="0"/>
+              </a:spcBef>
+              <a:spcAft>
+                <a:spcPts val="0"/>
+              </a:spcAft>
+              <a:buClr>
+                <a:srgbClr val="ED5604"/>
+              </a:buClr>
+              <a:buFont typeface="Arial"/>
+              <a:buChar char="✓"/>
+            </a:pPr>
+            <a:r>
+              <a:rPr b="0" i="0" lang="en-US" sz="1050" u="none" cap="none" strike="noStrike">
+                <a:solidFill>
+                  <a:srgbClr val="000000"/>
+                </a:solidFill>
+                <a:latin typeface="Arial"/>
+                <a:ea typeface="Arial"/>
+                <a:cs typeface="Arial"/>
+                <a:sym typeface="Arial"/>
+              </a:rPr>
+              <a:t>進捗管理表（移管ステータス）が最新になっている</a:t>
+            </a:r>
+            <a:endParaRPr b="0" i="0" sz="1000" u="none" cap="none" strike="noStrike">
+              <a:solidFill>
+                <a:srgbClr val="000000"/>
+              </a:solidFill>
+              <a:latin typeface="Arial"/>
+              <a:ea typeface="Arial"/>
+              <a:cs typeface="Arial"/>
+              <a:sym typeface="Arial"/>
+            </a:endParaRPr>
+          </a:p>
+          <a:p>
+            <a:pPr indent="-228600" lvl="0" marL="228600" marR="0" rtl="0" algn="l">
+              <a:spcBef>
+                <a:spcPts val="0"/>
+              </a:spcBef>
+              <a:spcAft>
+                <a:spcPts val="0"/>
+              </a:spcAft>
+              <a:buClr>
+                <a:srgbClr val="ED5604"/>
+              </a:buClr>
+              <a:buFont typeface="Arial"/>
+              <a:buChar char="✓"/>
+            </a:pPr>
+            <a:r>
+              <a:rPr b="0" i="0" lang="en-US" sz="1050" u="none" cap="none" strike="noStrike">
+                <a:solidFill>
+                  <a:srgbClr val="000000"/>
+                </a:solidFill>
+                <a:latin typeface="Arial"/>
+                <a:ea typeface="Arial"/>
+                <a:cs typeface="Arial"/>
+                <a:sym typeface="Arial"/>
+              </a:rPr>
+              <a:t>稟議に必要な情報（移管する予算と契約、来年度予算）が整理されている</a:t>
+            </a:r>
+            <a:endParaRPr b="0" i="0" sz="1000" u="none" cap="none" strike="noStrike">
+              <a:solidFill>
+                <a:srgbClr val="000000"/>
+              </a:solidFill>
+              <a:latin typeface="Arial"/>
+              <a:ea typeface="Arial"/>
+              <a:cs typeface="Arial"/>
+              <a:sym typeface="Arial"/>
+            </a:endParaRPr>
+          </a:p>
         </p:txBody>
       </p:sp>
       <p:sp>
@@ -11037,7 +11741,7 @@
         </p:nvSpPr>
         <p:spPr>
           <a:xfrm>
-            <a:off x="6333627" y="5458968"/>
+            <a:off x="6333627" y="5440680"/>
             <a:ext cx="5061018" cy="265663"/>
           </a:xfrm>
           <a:prstGeom prst="rect">
@@ -11078,7 +11782,7 @@
                 <a:cs typeface="Arial"/>
                 <a:sym typeface="Arial"/>
               </a:rPr>
-              <a:t>担当BPの完了状態：移管後の業務を開始できる</a:t>
+              <a:t>担当BP：移管後の業務を開始できる</a:t>
             </a:r>
             <a:endParaRPr b="0" i="0" sz="1200" u="none" cap="none" strike="noStrike">
               <a:solidFill>
@@ -11100,8 +11804,8 @@
         </p:nvSpPr>
         <p:spPr>
           <a:xfrm>
-            <a:off x="6333627" y="5742432"/>
-            <a:ext cx="5061018" cy="603504"/>
+            <a:off x="6333627" y="5705856"/>
+            <a:ext cx="5061018" cy="658368"/>
           </a:xfrm>
           <a:prstGeom prst="rect">
             <a:avLst/>
@@ -11117,7 +11821,7 @@
           </a:bodyPr>
           <a:lstStyle/>
           <a:p>
-            <a:pPr indent="0" lvl="0" marL="0" marR="0" rtl="0" algn="l">
+            <a:pPr indent="-228600" lvl="0" marL="228600" marR="0" rtl="0" algn="l">
               <a:spcBef>
                 <a:spcPts val="0"/>
               </a:spcBef>
@@ -11125,14 +11829,13 @@
                 <a:spcPts val="0"/>
               </a:spcAft>
               <a:buClr>
-                <a:srgbClr val="000000"/>
+                <a:srgbClr val="ED5604"/>
               </a:buClr>
-              <a:buSzPts val="1000"/>
               <a:buFont typeface="Arial"/>
-              <a:buNone/>
+              <a:buChar char="✓"/>
             </a:pPr>
             <a:r>
-              <a:rPr b="0" i="0" lang="en-US" sz="1000" u="none" cap="none" strike="noStrike">
+              <a:rPr b="0" i="0" lang="en-US" sz="1050" u="none" cap="none" strike="noStrike">
                 <a:solidFill>
                   <a:srgbClr val="000000"/>
                 </a:solidFill>
@@ -11141,7 +11844,79 @@
                 <a:cs typeface="Arial"/>
                 <a:sym typeface="Arial"/>
               </a:rPr>
-              <a:t>そのための材料：承認された合意文書（移管する予算と契約、引き継ぐ業務、報告・相談の方法、時期）と、引き継いだ業務マニュアル・契約書・過去の記録</a:t>
+              <a:t>承認された合意文書（予算と契約、引き継ぐ業務、報告・相談の方法、時期）がある</a:t>
+            </a:r>
+            <a:endParaRPr b="0" i="0" sz="1000" u="none" cap="none" strike="noStrike">
+              <a:solidFill>
+                <a:srgbClr val="000000"/>
+              </a:solidFill>
+              <a:latin typeface="Arial"/>
+              <a:ea typeface="Arial"/>
+              <a:cs typeface="Arial"/>
+              <a:sym typeface="Arial"/>
+            </a:endParaRPr>
+          </a:p>
+          <a:p>
+            <a:pPr indent="-228600" lvl="0" marL="228600" marR="0" rtl="0" algn="l">
+              <a:spcBef>
+                <a:spcPts val="0"/>
+              </a:spcBef>
+              <a:spcAft>
+                <a:spcPts val="0"/>
+              </a:spcAft>
+              <a:buClr>
+                <a:srgbClr val="ED5604"/>
+              </a:buClr>
+              <a:buFont typeface="Arial"/>
+              <a:buChar char="✓"/>
+            </a:pPr>
+            <a:r>
+              <a:rPr b="0" i="0" lang="en-US" sz="1050" u="none" cap="none" strike="noStrike">
+                <a:solidFill>
+                  <a:srgbClr val="000000"/>
+                </a:solidFill>
+                <a:latin typeface="Arial"/>
+                <a:ea typeface="Arial"/>
+                <a:cs typeface="Arial"/>
+                <a:sym typeface="Arial"/>
+              </a:rPr>
+              <a:t>業務マニュアル・契約書・過去の記録を引き継いでいる</a:t>
+            </a:r>
+            <a:endParaRPr b="0" i="0" sz="1000" u="none" cap="none" strike="noStrike">
+              <a:solidFill>
+                <a:srgbClr val="000000"/>
+              </a:solidFill>
+              <a:latin typeface="Arial"/>
+              <a:ea typeface="Arial"/>
+              <a:cs typeface="Arial"/>
+              <a:sym typeface="Arial"/>
+            </a:endParaRPr>
+          </a:p>
+          <a:p>
+            <a:pPr indent="-228600" lvl="0" marL="228600" marR="0" rtl="0" algn="l">
+              <a:spcBef>
+                <a:spcPts val="0"/>
+              </a:spcBef>
+              <a:spcAft>
+                <a:spcPts val="0"/>
+              </a:spcAft>
+              <a:buClr>
+                <a:srgbClr val="ED5604"/>
+              </a:buClr>
+              <a:buFont typeface="Arial"/>
+              <a:buChar char="✓"/>
+            </a:pPr>
+            <a:r>
+              <a:rPr b="0" i="0" lang="en-US" sz="1050" u="none" cap="none" strike="noStrike">
+                <a:solidFill>
+                  <a:srgbClr val="000000"/>
+                </a:solidFill>
+                <a:latin typeface="Arial"/>
+                <a:ea typeface="Arial"/>
+                <a:cs typeface="Arial"/>
+                <a:sym typeface="Arial"/>
+              </a:rPr>
+              <a:t>1月から GDSが契約の管理と支払いを始められる</a:t>
             </a:r>
             <a:endParaRPr b="0" i="0" sz="1000" u="none" cap="none" strike="noStrike">
               <a:solidFill>
